--- a/docs/pptx/carbo/ritu-carbo-linsubhr-egfrdisc-anyhosp.pptx
+++ b/docs/pptx/carbo/ritu-carbo-linsubhr-egfrdisc-anyhosp.pptx
@@ -2443,7 +2443,7 @@
           </p:nvSpPr>
           <p:spPr>
             <a:xfrm>
-              <a:off x="1810493" y="2073503"/>
+              <a:off x="1813815" y="2073503"/>
               <a:ext cx="0" cy="3649639"/>
             </a:xfrm>
             <a:custGeom>
@@ -2486,7 +2486,7 @@
           </p:nvSpPr>
           <p:spPr>
             <a:xfrm>
-              <a:off x="4291851" y="2073503"/>
+              <a:off x="4291714" y="2073503"/>
               <a:ext cx="0" cy="3649639"/>
             </a:xfrm>
             <a:custGeom>
@@ -2529,7 +2529,7 @@
           </p:nvSpPr>
           <p:spPr>
             <a:xfrm>
-              <a:off x="6773208" y="2073503"/>
+              <a:off x="6769614" y="2073503"/>
               <a:ext cx="0" cy="3649639"/>
             </a:xfrm>
             <a:custGeom>
@@ -2787,7 +2787,7 @@
           </p:nvSpPr>
           <p:spPr>
             <a:xfrm>
-              <a:off x="3051172" y="2073503"/>
+              <a:off x="3052764" y="2073503"/>
               <a:ext cx="0" cy="3649639"/>
             </a:xfrm>
             <a:custGeom>
@@ -2830,7 +2830,7 @@
           </p:nvSpPr>
           <p:spPr>
             <a:xfrm>
-              <a:off x="5532530" y="2073503"/>
+              <a:off x="5530664" y="2073503"/>
               <a:ext cx="0" cy="3649639"/>
             </a:xfrm>
             <a:custGeom>
@@ -2873,7 +2873,7 @@
           </p:nvSpPr>
           <p:spPr>
             <a:xfrm>
-              <a:off x="8013887" y="2073503"/>
+              <a:off x="8008563" y="2073503"/>
               <a:ext cx="0" cy="3649639"/>
             </a:xfrm>
             <a:custGeom>
@@ -2917,530 +2917,527 @@
           <p:spPr>
             <a:xfrm>
               <a:off x="1172049" y="2073503"/>
-              <a:ext cx="7090630" cy="3304035"/>
+              <a:ext cx="7090630" cy="3301068"/>
             </a:xfrm>
             <a:custGeom>
               <a:avLst/>
               <a:pathLst>
-                <a:path w="7090630" h="3304035">
+                <a:path w="7090630" h="3301068">
                   <a:moveTo>
-                    <a:pt x="2000999" y="0"/>
+                    <a:pt x="2012526" y="0"/>
                   </a:moveTo>
                   <a:lnTo>
-                    <a:pt x="2005430" y="9157"/>
-                  </a:lnTo>
-                  <a:lnTo>
-                    <a:pt x="2077053" y="151123"/>
-                  </a:lnTo>
-                  <a:lnTo>
-                    <a:pt x="2148675" y="287289"/>
-                  </a:lnTo>
-                  <a:lnTo>
-                    <a:pt x="2220298" y="417891"/>
-                  </a:lnTo>
-                  <a:lnTo>
-                    <a:pt x="2291920" y="543158"/>
-                  </a:lnTo>
-                  <a:lnTo>
-                    <a:pt x="2363543" y="663305"/>
-                  </a:lnTo>
-                  <a:lnTo>
-                    <a:pt x="2435165" y="778544"/>
-                  </a:lnTo>
-                  <a:lnTo>
-                    <a:pt x="2506788" y="889075"/>
-                  </a:lnTo>
-                  <a:lnTo>
-                    <a:pt x="2578410" y="995089"/>
-                  </a:lnTo>
-                  <a:lnTo>
-                    <a:pt x="2650033" y="1096772"/>
-                  </a:lnTo>
-                  <a:lnTo>
-                    <a:pt x="2721655" y="1194300"/>
-                  </a:lnTo>
-                  <a:lnTo>
-                    <a:pt x="2793278" y="1287843"/>
-                  </a:lnTo>
-                  <a:lnTo>
-                    <a:pt x="2864901" y="1377565"/>
-                  </a:lnTo>
-                  <a:lnTo>
-                    <a:pt x="2936523" y="1463620"/>
-                  </a:lnTo>
-                  <a:lnTo>
-                    <a:pt x="3008146" y="1546159"/>
-                  </a:lnTo>
-                  <a:lnTo>
-                    <a:pt x="3079768" y="1625326"/>
-                  </a:lnTo>
-                  <a:lnTo>
-                    <a:pt x="3151391" y="1701258"/>
-                  </a:lnTo>
-                  <a:lnTo>
-                    <a:pt x="3223013" y="1774088"/>
-                  </a:lnTo>
-                  <a:lnTo>
-                    <a:pt x="3294636" y="1843942"/>
-                  </a:lnTo>
-                  <a:lnTo>
-                    <a:pt x="3366258" y="1910942"/>
-                  </a:lnTo>
-                  <a:lnTo>
-                    <a:pt x="3437881" y="1975204"/>
-                  </a:lnTo>
-                  <a:lnTo>
-                    <a:pt x="3509503" y="2036841"/>
-                  </a:lnTo>
-                  <a:lnTo>
-                    <a:pt x="3581126" y="2095959"/>
-                  </a:lnTo>
-                  <a:lnTo>
-                    <a:pt x="3652748" y="2152662"/>
-                  </a:lnTo>
-                  <a:lnTo>
-                    <a:pt x="3724371" y="2207048"/>
-                  </a:lnTo>
-                  <a:lnTo>
-                    <a:pt x="3795993" y="2259212"/>
-                  </a:lnTo>
-                  <a:lnTo>
-                    <a:pt x="3867616" y="2309245"/>
-                  </a:lnTo>
-                  <a:lnTo>
-                    <a:pt x="3939238" y="2357233"/>
-                  </a:lnTo>
-                  <a:lnTo>
-                    <a:pt x="4010861" y="2403261"/>
-                  </a:lnTo>
-                  <a:lnTo>
-                    <a:pt x="4082483" y="2447408"/>
-                  </a:lnTo>
-                  <a:lnTo>
-                    <a:pt x="4154106" y="2489751"/>
-                  </a:lnTo>
-                  <a:lnTo>
-                    <a:pt x="4225729" y="2530364"/>
-                  </a:lnTo>
-                  <a:lnTo>
-                    <a:pt x="4297351" y="2569318"/>
-                  </a:lnTo>
-                  <a:lnTo>
-                    <a:pt x="4368974" y="2606680"/>
-                  </a:lnTo>
-                  <a:lnTo>
-                    <a:pt x="4440596" y="2642516"/>
-                  </a:lnTo>
-                  <a:lnTo>
-                    <a:pt x="4512219" y="2656035"/>
-                  </a:lnTo>
-                  <a:lnTo>
-                    <a:pt x="4583841" y="2658673"/>
-                  </a:lnTo>
-                  <a:lnTo>
-                    <a:pt x="4655464" y="2661303"/>
-                  </a:lnTo>
-                  <a:lnTo>
-                    <a:pt x="4727086" y="2663924"/>
-                  </a:lnTo>
-                  <a:lnTo>
-                    <a:pt x="4798709" y="2666537"/>
-                  </a:lnTo>
-                  <a:lnTo>
-                    <a:pt x="4870331" y="2669142"/>
-                  </a:lnTo>
-                  <a:lnTo>
-                    <a:pt x="4941954" y="2671738"/>
-                  </a:lnTo>
-                  <a:lnTo>
-                    <a:pt x="5013576" y="2674326"/>
-                  </a:lnTo>
-                  <a:lnTo>
-                    <a:pt x="5085199" y="2676906"/>
-                  </a:lnTo>
-                  <a:lnTo>
-                    <a:pt x="5156821" y="2679478"/>
-                  </a:lnTo>
-                  <a:lnTo>
-                    <a:pt x="5228444" y="2682041"/>
-                  </a:lnTo>
-                  <a:lnTo>
-                    <a:pt x="5300066" y="2684596"/>
-                  </a:lnTo>
-                  <a:lnTo>
-                    <a:pt x="5371689" y="2687144"/>
-                  </a:lnTo>
-                  <a:lnTo>
-                    <a:pt x="5443311" y="2689683"/>
-                  </a:lnTo>
-                  <a:lnTo>
-                    <a:pt x="5514934" y="2692213"/>
-                  </a:lnTo>
-                  <a:lnTo>
-                    <a:pt x="5586557" y="2694736"/>
-                  </a:lnTo>
-                  <a:lnTo>
-                    <a:pt x="5658179" y="2697251"/>
-                  </a:lnTo>
-                  <a:lnTo>
-                    <a:pt x="5729802" y="2699758"/>
-                  </a:lnTo>
-                  <a:lnTo>
-                    <a:pt x="5801424" y="2702257"/>
-                  </a:lnTo>
-                  <a:lnTo>
-                    <a:pt x="5873047" y="2704748"/>
-                  </a:lnTo>
-                  <a:lnTo>
-                    <a:pt x="5944669" y="2707230"/>
-                  </a:lnTo>
-                  <a:lnTo>
-                    <a:pt x="6016292" y="2709705"/>
-                  </a:lnTo>
-                  <a:lnTo>
-                    <a:pt x="6087914" y="2712173"/>
-                  </a:lnTo>
-                  <a:lnTo>
-                    <a:pt x="6159537" y="2714632"/>
-                  </a:lnTo>
-                  <a:lnTo>
-                    <a:pt x="6231159" y="2717083"/>
-                  </a:lnTo>
-                  <a:lnTo>
-                    <a:pt x="6302782" y="2719527"/>
-                  </a:lnTo>
-                  <a:lnTo>
-                    <a:pt x="6374404" y="2721962"/>
-                  </a:lnTo>
-                  <a:lnTo>
-                    <a:pt x="6446027" y="2724391"/>
-                  </a:lnTo>
-                  <a:lnTo>
-                    <a:pt x="6517649" y="2726811"/>
-                  </a:lnTo>
-                  <a:lnTo>
-                    <a:pt x="6589272" y="2729223"/>
-                  </a:lnTo>
-                  <a:lnTo>
-                    <a:pt x="6660894" y="2731628"/>
-                  </a:lnTo>
-                  <a:lnTo>
-                    <a:pt x="6732517" y="2734025"/>
-                  </a:lnTo>
-                  <a:lnTo>
-                    <a:pt x="6804139" y="2736415"/>
-                  </a:lnTo>
-                  <a:lnTo>
-                    <a:pt x="6875762" y="2738797"/>
-                  </a:lnTo>
-                  <a:lnTo>
-                    <a:pt x="6947385" y="2741171"/>
-                  </a:lnTo>
-                  <a:lnTo>
-                    <a:pt x="7019007" y="2743538"/>
-                  </a:lnTo>
-                  <a:lnTo>
-                    <a:pt x="7090630" y="2745897"/>
-                  </a:lnTo>
-                  <a:lnTo>
-                    <a:pt x="7090630" y="3304035"/>
-                  </a:lnTo>
-                  <a:lnTo>
-                    <a:pt x="7019007" y="3296380"/>
-                  </a:lnTo>
-                  <a:lnTo>
-                    <a:pt x="6947385" y="3288398"/>
-                  </a:lnTo>
-                  <a:lnTo>
-                    <a:pt x="6875762" y="3280077"/>
-                  </a:lnTo>
-                  <a:lnTo>
-                    <a:pt x="6804139" y="3271400"/>
-                  </a:lnTo>
-                  <a:lnTo>
-                    <a:pt x="6732517" y="3262355"/>
-                  </a:lnTo>
-                  <a:lnTo>
-                    <a:pt x="6660894" y="3252924"/>
-                  </a:lnTo>
-                  <a:lnTo>
-                    <a:pt x="6589272" y="3243091"/>
-                  </a:lnTo>
-                  <a:lnTo>
-                    <a:pt x="6517649" y="3232839"/>
-                  </a:lnTo>
-                  <a:lnTo>
-                    <a:pt x="6446027" y="3222151"/>
-                  </a:lnTo>
-                  <a:lnTo>
-                    <a:pt x="6374404" y="3211007"/>
-                  </a:lnTo>
-                  <a:lnTo>
-                    <a:pt x="6302782" y="3199389"/>
-                  </a:lnTo>
-                  <a:lnTo>
-                    <a:pt x="6231159" y="3187275"/>
-                  </a:lnTo>
-                  <a:lnTo>
-                    <a:pt x="6159537" y="3174646"/>
-                  </a:lnTo>
-                  <a:lnTo>
-                    <a:pt x="6087914" y="3161478"/>
-                  </a:lnTo>
-                  <a:lnTo>
-                    <a:pt x="6016292" y="3147750"/>
-                  </a:lnTo>
-                  <a:lnTo>
-                    <a:pt x="5944669" y="3133437"/>
-                  </a:lnTo>
-                  <a:lnTo>
-                    <a:pt x="5873047" y="3118514"/>
-                  </a:lnTo>
-                  <a:lnTo>
-                    <a:pt x="5801424" y="3102956"/>
-                  </a:lnTo>
-                  <a:lnTo>
-                    <a:pt x="5729802" y="3086734"/>
-                  </a:lnTo>
-                  <a:lnTo>
-                    <a:pt x="5658179" y="3069822"/>
-                  </a:lnTo>
-                  <a:lnTo>
-                    <a:pt x="5586557" y="3052189"/>
-                  </a:lnTo>
-                  <a:lnTo>
-                    <a:pt x="5514934" y="3033805"/>
-                  </a:lnTo>
-                  <a:lnTo>
-                    <a:pt x="5443311" y="3014638"/>
-                  </a:lnTo>
-                  <a:lnTo>
-                    <a:pt x="5371689" y="2994655"/>
-                  </a:lnTo>
-                  <a:lnTo>
-                    <a:pt x="5300066" y="2973820"/>
-                  </a:lnTo>
-                  <a:lnTo>
-                    <a:pt x="5228444" y="2952098"/>
-                  </a:lnTo>
-                  <a:lnTo>
-                    <a:pt x="5156821" y="2929450"/>
-                  </a:lnTo>
-                  <a:lnTo>
-                    <a:pt x="5085199" y="2905837"/>
-                  </a:lnTo>
-                  <a:lnTo>
-                    <a:pt x="5013576" y="2881219"/>
-                  </a:lnTo>
-                  <a:lnTo>
-                    <a:pt x="4941954" y="2855552"/>
-                  </a:lnTo>
-                  <a:lnTo>
-                    <a:pt x="4870331" y="2828792"/>
-                  </a:lnTo>
-                  <a:lnTo>
-                    <a:pt x="4798709" y="2800891"/>
-                  </a:lnTo>
-                  <a:lnTo>
-                    <a:pt x="4727086" y="2771802"/>
-                  </a:lnTo>
-                  <a:lnTo>
-                    <a:pt x="4655464" y="2741474"/>
-                  </a:lnTo>
-                  <a:lnTo>
-                    <a:pt x="4583841" y="2709854"/>
-                  </a:lnTo>
-                  <a:lnTo>
-                    <a:pt x="4512219" y="2676887"/>
-                  </a:lnTo>
-                  <a:lnTo>
-                    <a:pt x="4440596" y="2653388"/>
-                  </a:lnTo>
-                  <a:lnTo>
-                    <a:pt x="4368974" y="2650733"/>
-                  </a:lnTo>
-                  <a:lnTo>
-                    <a:pt x="4297351" y="2648070"/>
-                  </a:lnTo>
-                  <a:lnTo>
-                    <a:pt x="4225729" y="2645398"/>
-                  </a:lnTo>
-                  <a:lnTo>
-                    <a:pt x="4154106" y="2642717"/>
-                  </a:lnTo>
-                  <a:lnTo>
-                    <a:pt x="4082483" y="2640028"/>
-                  </a:lnTo>
-                  <a:lnTo>
-                    <a:pt x="4010861" y="2637330"/>
-                  </a:lnTo>
-                  <a:lnTo>
-                    <a:pt x="3939238" y="2634624"/>
-                  </a:lnTo>
-                  <a:lnTo>
-                    <a:pt x="3867616" y="2631909"/>
-                  </a:lnTo>
-                  <a:lnTo>
-                    <a:pt x="3795993" y="2629185"/>
-                  </a:lnTo>
-                  <a:lnTo>
-                    <a:pt x="3724371" y="2626452"/>
-                  </a:lnTo>
-                  <a:lnTo>
-                    <a:pt x="3652748" y="2623711"/>
-                  </a:lnTo>
-                  <a:lnTo>
-                    <a:pt x="3581126" y="2620961"/>
-                  </a:lnTo>
-                  <a:lnTo>
-                    <a:pt x="3509503" y="2618203"/>
-                  </a:lnTo>
-                  <a:lnTo>
-                    <a:pt x="3437881" y="2615435"/>
-                  </a:lnTo>
-                  <a:lnTo>
-                    <a:pt x="3366258" y="2612659"/>
-                  </a:lnTo>
-                  <a:lnTo>
-                    <a:pt x="3294636" y="2609873"/>
-                  </a:lnTo>
-                  <a:lnTo>
-                    <a:pt x="3223013" y="2607079"/>
-                  </a:lnTo>
-                  <a:lnTo>
-                    <a:pt x="3151391" y="2604276"/>
-                  </a:lnTo>
-                  <a:lnTo>
-                    <a:pt x="3079768" y="2601464"/>
-                  </a:lnTo>
-                  <a:lnTo>
-                    <a:pt x="3008146" y="2598643"/>
-                  </a:lnTo>
-                  <a:lnTo>
-                    <a:pt x="2936523" y="2595813"/>
-                  </a:lnTo>
-                  <a:lnTo>
-                    <a:pt x="2864901" y="2592974"/>
-                  </a:lnTo>
-                  <a:lnTo>
-                    <a:pt x="2793278" y="2590125"/>
-                  </a:lnTo>
-                  <a:lnTo>
-                    <a:pt x="2721655" y="2587268"/>
-                  </a:lnTo>
-                  <a:lnTo>
-                    <a:pt x="2650033" y="2584401"/>
-                  </a:lnTo>
-                  <a:lnTo>
-                    <a:pt x="2578410" y="2581526"/>
-                  </a:lnTo>
-                  <a:lnTo>
-                    <a:pt x="2506788" y="2578641"/>
-                  </a:lnTo>
-                  <a:lnTo>
-                    <a:pt x="2435165" y="2575747"/>
-                  </a:lnTo>
-                  <a:lnTo>
-                    <a:pt x="2363543" y="2572844"/>
-                  </a:lnTo>
-                  <a:lnTo>
-                    <a:pt x="2291920" y="2569931"/>
-                  </a:lnTo>
-                  <a:lnTo>
-                    <a:pt x="2220298" y="2567009"/>
-                  </a:lnTo>
-                  <a:lnTo>
-                    <a:pt x="2148675" y="2564078"/>
-                  </a:lnTo>
-                  <a:lnTo>
-                    <a:pt x="2077053" y="2561137"/>
-                  </a:lnTo>
-                  <a:lnTo>
-                    <a:pt x="2005430" y="2558187"/>
-                  </a:lnTo>
-                  <a:lnTo>
-                    <a:pt x="1933808" y="2555228"/>
-                  </a:lnTo>
-                  <a:lnTo>
-                    <a:pt x="1862185" y="2552259"/>
-                  </a:lnTo>
-                  <a:lnTo>
-                    <a:pt x="1790563" y="2549280"/>
-                  </a:lnTo>
-                  <a:lnTo>
-                    <a:pt x="1718940" y="2546293"/>
-                  </a:lnTo>
-                  <a:lnTo>
-                    <a:pt x="1647318" y="2543295"/>
-                  </a:lnTo>
-                  <a:lnTo>
-                    <a:pt x="1575695" y="2540288"/>
-                  </a:lnTo>
-                  <a:lnTo>
-                    <a:pt x="1504073" y="2537271"/>
-                  </a:lnTo>
-                  <a:lnTo>
-                    <a:pt x="1432450" y="2534245"/>
-                  </a:lnTo>
-                  <a:lnTo>
-                    <a:pt x="1360827" y="2531209"/>
-                  </a:lnTo>
-                  <a:lnTo>
-                    <a:pt x="1289205" y="2528163"/>
-                  </a:lnTo>
-                  <a:lnTo>
-                    <a:pt x="1217582" y="2525108"/>
-                  </a:lnTo>
-                  <a:lnTo>
-                    <a:pt x="1145960" y="2522043"/>
-                  </a:lnTo>
-                  <a:lnTo>
-                    <a:pt x="1074337" y="2518967"/>
-                  </a:lnTo>
-                  <a:lnTo>
-                    <a:pt x="1002715" y="2515883"/>
-                  </a:lnTo>
-                  <a:lnTo>
-                    <a:pt x="931092" y="2512788"/>
-                  </a:lnTo>
-                  <a:lnTo>
-                    <a:pt x="859470" y="2509683"/>
-                  </a:lnTo>
-                  <a:lnTo>
-                    <a:pt x="787847" y="2506569"/>
-                  </a:lnTo>
-                  <a:lnTo>
-                    <a:pt x="716225" y="2503444"/>
-                  </a:lnTo>
-                  <a:lnTo>
-                    <a:pt x="644602" y="2500310"/>
-                  </a:lnTo>
-                  <a:lnTo>
-                    <a:pt x="572980" y="2497165"/>
-                  </a:lnTo>
-                  <a:lnTo>
-                    <a:pt x="501357" y="2494011"/>
-                  </a:lnTo>
-                  <a:lnTo>
-                    <a:pt x="429735" y="2490846"/>
-                  </a:lnTo>
-                  <a:lnTo>
-                    <a:pt x="358112" y="2487671"/>
-                  </a:lnTo>
-                  <a:lnTo>
-                    <a:pt x="286490" y="2484486"/>
-                  </a:lnTo>
-                  <a:lnTo>
-                    <a:pt x="214867" y="2481291"/>
-                  </a:lnTo>
-                  <a:lnTo>
-                    <a:pt x="143245" y="2478086"/>
-                  </a:lnTo>
-                  <a:lnTo>
-                    <a:pt x="71622" y="2474870"/>
-                  </a:lnTo>
-                  <a:lnTo>
-                    <a:pt x="0" y="2471644"/>
+                    <a:pt x="2077053" y="128344"/>
+                  </a:lnTo>
+                  <a:lnTo>
+                    <a:pt x="2148675" y="265001"/>
+                  </a:lnTo>
+                  <a:lnTo>
+                    <a:pt x="2220298" y="396092"/>
+                  </a:lnTo>
+                  <a:lnTo>
+                    <a:pt x="2291920" y="521845"/>
+                  </a:lnTo>
+                  <a:lnTo>
+                    <a:pt x="2363543" y="642475"/>
+                  </a:lnTo>
+                  <a:lnTo>
+                    <a:pt x="2435165" y="758193"/>
+                  </a:lnTo>
+                  <a:lnTo>
+                    <a:pt x="2506788" y="869198"/>
+                  </a:lnTo>
+                  <a:lnTo>
+                    <a:pt x="2578410" y="975682"/>
+                  </a:lnTo>
+                  <a:lnTo>
+                    <a:pt x="2650033" y="1077829"/>
+                  </a:lnTo>
+                  <a:lnTo>
+                    <a:pt x="2721655" y="1175815"/>
+                  </a:lnTo>
+                  <a:lnTo>
+                    <a:pt x="2793278" y="1269811"/>
+                  </a:lnTo>
+                  <a:lnTo>
+                    <a:pt x="2864901" y="1359979"/>
+                  </a:lnTo>
+                  <a:lnTo>
+                    <a:pt x="2936523" y="1446475"/>
+                  </a:lnTo>
+                  <a:lnTo>
+                    <a:pt x="3008146" y="1529448"/>
+                  </a:lnTo>
+                  <a:lnTo>
+                    <a:pt x="3079768" y="1609041"/>
+                  </a:lnTo>
+                  <a:lnTo>
+                    <a:pt x="3151391" y="1685393"/>
+                  </a:lnTo>
+                  <a:lnTo>
+                    <a:pt x="3223013" y="1758636"/>
+                  </a:lnTo>
+                  <a:lnTo>
+                    <a:pt x="3294636" y="1828895"/>
+                  </a:lnTo>
+                  <a:lnTo>
+                    <a:pt x="3366258" y="1896293"/>
+                  </a:lnTo>
+                  <a:lnTo>
+                    <a:pt x="3437881" y="1960946"/>
+                  </a:lnTo>
+                  <a:lnTo>
+                    <a:pt x="3509503" y="2022965"/>
+                  </a:lnTo>
+                  <a:lnTo>
+                    <a:pt x="3581126" y="2082459"/>
+                  </a:lnTo>
+                  <a:lnTo>
+                    <a:pt x="3652748" y="2139530"/>
+                  </a:lnTo>
+                  <a:lnTo>
+                    <a:pt x="3724371" y="2194276"/>
+                  </a:lnTo>
+                  <a:lnTo>
+                    <a:pt x="3795993" y="2246793"/>
+                  </a:lnTo>
+                  <a:lnTo>
+                    <a:pt x="3867616" y="2297171"/>
+                  </a:lnTo>
+                  <a:lnTo>
+                    <a:pt x="3939238" y="2345497"/>
+                  </a:lnTo>
+                  <a:lnTo>
+                    <a:pt x="4010861" y="2391855"/>
+                  </a:lnTo>
+                  <a:lnTo>
+                    <a:pt x="4082483" y="2436325"/>
+                  </a:lnTo>
+                  <a:lnTo>
+                    <a:pt x="4154106" y="2478984"/>
+                  </a:lnTo>
+                  <a:lnTo>
+                    <a:pt x="4225729" y="2519905"/>
+                  </a:lnTo>
+                  <a:lnTo>
+                    <a:pt x="4297351" y="2559160"/>
+                  </a:lnTo>
+                  <a:lnTo>
+                    <a:pt x="4368974" y="2596816"/>
+                  </a:lnTo>
+                  <a:lnTo>
+                    <a:pt x="4440596" y="2632939"/>
+                  </a:lnTo>
+                  <a:lnTo>
+                    <a:pt x="4512219" y="2655253"/>
+                  </a:lnTo>
+                  <a:lnTo>
+                    <a:pt x="4583841" y="2657741"/>
+                  </a:lnTo>
+                  <a:lnTo>
+                    <a:pt x="4655464" y="2660222"/>
+                  </a:lnTo>
+                  <a:lnTo>
+                    <a:pt x="4727086" y="2662695"/>
+                  </a:lnTo>
+                  <a:lnTo>
+                    <a:pt x="4798709" y="2665161"/>
+                  </a:lnTo>
+                  <a:lnTo>
+                    <a:pt x="4870331" y="2667620"/>
+                  </a:lnTo>
+                  <a:lnTo>
+                    <a:pt x="4941954" y="2670071"/>
+                  </a:lnTo>
+                  <a:lnTo>
+                    <a:pt x="5013576" y="2672515"/>
+                  </a:lnTo>
+                  <a:lnTo>
+                    <a:pt x="5085199" y="2674952"/>
+                  </a:lnTo>
+                  <a:lnTo>
+                    <a:pt x="5156821" y="2677381"/>
+                  </a:lnTo>
+                  <a:lnTo>
+                    <a:pt x="5228444" y="2679803"/>
+                  </a:lnTo>
+                  <a:lnTo>
+                    <a:pt x="5300066" y="2682217"/>
+                  </a:lnTo>
+                  <a:lnTo>
+                    <a:pt x="5371689" y="2684625"/>
+                  </a:lnTo>
+                  <a:lnTo>
+                    <a:pt x="5443311" y="2687025"/>
+                  </a:lnTo>
+                  <a:lnTo>
+                    <a:pt x="5514934" y="2689418"/>
+                  </a:lnTo>
+                  <a:lnTo>
+                    <a:pt x="5586557" y="2691803"/>
+                  </a:lnTo>
+                  <a:lnTo>
+                    <a:pt x="5658179" y="2694182"/>
+                  </a:lnTo>
+                  <a:lnTo>
+                    <a:pt x="5729802" y="2696553"/>
+                  </a:lnTo>
+                  <a:lnTo>
+                    <a:pt x="5801424" y="2698918"/>
+                  </a:lnTo>
+                  <a:lnTo>
+                    <a:pt x="5873047" y="2701275"/>
+                  </a:lnTo>
+                  <a:lnTo>
+                    <a:pt x="5944669" y="2703625"/>
+                  </a:lnTo>
+                  <a:lnTo>
+                    <a:pt x="6016292" y="2705968"/>
+                  </a:lnTo>
+                  <a:lnTo>
+                    <a:pt x="6087914" y="2708304"/>
+                  </a:lnTo>
+                  <a:lnTo>
+                    <a:pt x="6159537" y="2710633"/>
+                  </a:lnTo>
+                  <a:lnTo>
+                    <a:pt x="6231159" y="2712955"/>
+                  </a:lnTo>
+                  <a:lnTo>
+                    <a:pt x="6302782" y="2715270"/>
+                  </a:lnTo>
+                  <a:lnTo>
+                    <a:pt x="6374404" y="2717578"/>
+                  </a:lnTo>
+                  <a:lnTo>
+                    <a:pt x="6446027" y="2719879"/>
+                  </a:lnTo>
+                  <a:lnTo>
+                    <a:pt x="6517649" y="2722174"/>
+                  </a:lnTo>
+                  <a:lnTo>
+                    <a:pt x="6589272" y="2724461"/>
+                  </a:lnTo>
+                  <a:lnTo>
+                    <a:pt x="6660894" y="2726742"/>
+                  </a:lnTo>
+                  <a:lnTo>
+                    <a:pt x="6732517" y="2729015"/>
+                  </a:lnTo>
+                  <a:lnTo>
+                    <a:pt x="6804139" y="2731282"/>
+                  </a:lnTo>
+                  <a:lnTo>
+                    <a:pt x="6875762" y="2733542"/>
+                  </a:lnTo>
+                  <a:lnTo>
+                    <a:pt x="6947385" y="2735795"/>
+                  </a:lnTo>
+                  <a:lnTo>
+                    <a:pt x="7019007" y="2738042"/>
+                  </a:lnTo>
+                  <a:lnTo>
+                    <a:pt x="7090630" y="2740281"/>
+                  </a:lnTo>
+                  <a:lnTo>
+                    <a:pt x="7090630" y="3301068"/>
+                  </a:lnTo>
+                  <a:lnTo>
+                    <a:pt x="7019007" y="3293312"/>
+                  </a:lnTo>
+                  <a:lnTo>
+                    <a:pt x="6947385" y="3285227"/>
+                  </a:lnTo>
+                  <a:lnTo>
+                    <a:pt x="6875762" y="3276799"/>
+                  </a:lnTo>
+                  <a:lnTo>
+                    <a:pt x="6804139" y="3268013"/>
+                  </a:lnTo>
+                  <a:lnTo>
+                    <a:pt x="6732517" y="3258853"/>
+                  </a:lnTo>
+                  <a:lnTo>
+                    <a:pt x="6660894" y="3249305"/>
+                  </a:lnTo>
+                  <a:lnTo>
+                    <a:pt x="6589272" y="3239351"/>
+                  </a:lnTo>
+                  <a:lnTo>
+                    <a:pt x="6517649" y="3228975"/>
+                  </a:lnTo>
+                  <a:lnTo>
+                    <a:pt x="6446027" y="3218159"/>
+                  </a:lnTo>
+                  <a:lnTo>
+                    <a:pt x="6374404" y="3206883"/>
+                  </a:lnTo>
+                  <a:lnTo>
+                    <a:pt x="6302782" y="3195128"/>
+                  </a:lnTo>
+                  <a:lnTo>
+                    <a:pt x="6231159" y="3182874"/>
+                  </a:lnTo>
+                  <a:lnTo>
+                    <a:pt x="6159537" y="3170100"/>
+                  </a:lnTo>
+                  <a:lnTo>
+                    <a:pt x="6087914" y="3156784"/>
+                  </a:lnTo>
+                  <a:lnTo>
+                    <a:pt x="6016292" y="3142902"/>
+                  </a:lnTo>
+                  <a:lnTo>
+                    <a:pt x="5944669" y="3128431"/>
+                  </a:lnTo>
+                  <a:lnTo>
+                    <a:pt x="5873047" y="3113346"/>
+                  </a:lnTo>
+                  <a:lnTo>
+                    <a:pt x="5801424" y="3097620"/>
+                  </a:lnTo>
+                  <a:lnTo>
+                    <a:pt x="5729802" y="3081226"/>
+                  </a:lnTo>
+                  <a:lnTo>
+                    <a:pt x="5658179" y="3064136"/>
+                  </a:lnTo>
+                  <a:lnTo>
+                    <a:pt x="5586557" y="3046321"/>
+                  </a:lnTo>
+                  <a:lnTo>
+                    <a:pt x="5514934" y="3027749"/>
+                  </a:lnTo>
+                  <a:lnTo>
+                    <a:pt x="5443311" y="3008389"/>
+                  </a:lnTo>
+                  <a:lnTo>
+                    <a:pt x="5371689" y="2988207"/>
+                  </a:lnTo>
+                  <a:lnTo>
+                    <a:pt x="5300066" y="2967169"/>
+                  </a:lnTo>
+                  <a:lnTo>
+                    <a:pt x="5228444" y="2945236"/>
+                  </a:lnTo>
+                  <a:lnTo>
+                    <a:pt x="5156821" y="2922373"/>
+                  </a:lnTo>
+                  <a:lnTo>
+                    <a:pt x="5085199" y="2898539"/>
+                  </a:lnTo>
+                  <a:lnTo>
+                    <a:pt x="5013576" y="2873693"/>
+                  </a:lnTo>
+                  <a:lnTo>
+                    <a:pt x="4941954" y="2847792"/>
+                  </a:lnTo>
+                  <a:lnTo>
+                    <a:pt x="4870331" y="2820792"/>
+                  </a:lnTo>
+                  <a:lnTo>
+                    <a:pt x="4798709" y="2792645"/>
+                  </a:lnTo>
+                  <a:lnTo>
+                    <a:pt x="4727086" y="2763303"/>
+                  </a:lnTo>
+                  <a:lnTo>
+                    <a:pt x="4655464" y="2732716"/>
+                  </a:lnTo>
+                  <a:lnTo>
+                    <a:pt x="4583841" y="2700830"/>
+                  </a:lnTo>
+                  <a:lnTo>
+                    <a:pt x="4512219" y="2667590"/>
+                  </a:lnTo>
+                  <a:lnTo>
+                    <a:pt x="4440596" y="2652757"/>
+                  </a:lnTo>
+                  <a:lnTo>
+                    <a:pt x="4368974" y="2650254"/>
+                  </a:lnTo>
+                  <a:lnTo>
+                    <a:pt x="4297351" y="2647743"/>
+                  </a:lnTo>
+                  <a:lnTo>
+                    <a:pt x="4225729" y="2645224"/>
+                  </a:lnTo>
+                  <a:lnTo>
+                    <a:pt x="4154106" y="2642698"/>
+                  </a:lnTo>
+                  <a:lnTo>
+                    <a:pt x="4082483" y="2640164"/>
+                  </a:lnTo>
+                  <a:lnTo>
+                    <a:pt x="4010861" y="2637623"/>
+                  </a:lnTo>
+                  <a:lnTo>
+                    <a:pt x="3939238" y="2635074"/>
+                  </a:lnTo>
+                  <a:lnTo>
+                    <a:pt x="3867616" y="2632518"/>
+                  </a:lnTo>
+                  <a:lnTo>
+                    <a:pt x="3795993" y="2629953"/>
+                  </a:lnTo>
+                  <a:lnTo>
+                    <a:pt x="3724371" y="2627381"/>
+                  </a:lnTo>
+                  <a:lnTo>
+                    <a:pt x="3652748" y="2624801"/>
+                  </a:lnTo>
+                  <a:lnTo>
+                    <a:pt x="3581126" y="2622214"/>
+                  </a:lnTo>
+                  <a:lnTo>
+                    <a:pt x="3509503" y="2619618"/>
+                  </a:lnTo>
+                  <a:lnTo>
+                    <a:pt x="3437881" y="2617015"/>
+                  </a:lnTo>
+                  <a:lnTo>
+                    <a:pt x="3366258" y="2614404"/>
+                  </a:lnTo>
+                  <a:lnTo>
+                    <a:pt x="3294636" y="2611785"/>
+                  </a:lnTo>
+                  <a:lnTo>
+                    <a:pt x="3223013" y="2609158"/>
+                  </a:lnTo>
+                  <a:lnTo>
+                    <a:pt x="3151391" y="2606524"/>
+                  </a:lnTo>
+                  <a:lnTo>
+                    <a:pt x="3079768" y="2603881"/>
+                  </a:lnTo>
+                  <a:lnTo>
+                    <a:pt x="3008146" y="2601230"/>
+                  </a:lnTo>
+                  <a:lnTo>
+                    <a:pt x="2936523" y="2598572"/>
+                  </a:lnTo>
+                  <a:lnTo>
+                    <a:pt x="2864901" y="2595905"/>
+                  </a:lnTo>
+                  <a:lnTo>
+                    <a:pt x="2793278" y="2593231"/>
+                  </a:lnTo>
+                  <a:lnTo>
+                    <a:pt x="2721655" y="2590548"/>
+                  </a:lnTo>
+                  <a:lnTo>
+                    <a:pt x="2650033" y="2587857"/>
+                  </a:lnTo>
+                  <a:lnTo>
+                    <a:pt x="2578410" y="2585158"/>
+                  </a:lnTo>
+                  <a:lnTo>
+                    <a:pt x="2506788" y="2582451"/>
+                  </a:lnTo>
+                  <a:lnTo>
+                    <a:pt x="2435165" y="2579736"/>
+                  </a:lnTo>
+                  <a:lnTo>
+                    <a:pt x="2363543" y="2577013"/>
+                  </a:lnTo>
+                  <a:lnTo>
+                    <a:pt x="2291920" y="2574281"/>
+                  </a:lnTo>
+                  <a:lnTo>
+                    <a:pt x="2220298" y="2571541"/>
+                  </a:lnTo>
+                  <a:lnTo>
+                    <a:pt x="2148675" y="2568793"/>
+                  </a:lnTo>
+                  <a:lnTo>
+                    <a:pt x="2077053" y="2566037"/>
+                  </a:lnTo>
+                  <a:lnTo>
+                    <a:pt x="2005430" y="2563273"/>
+                  </a:lnTo>
+                  <a:lnTo>
+                    <a:pt x="1933808" y="2560500"/>
+                  </a:lnTo>
+                  <a:lnTo>
+                    <a:pt x="1862185" y="2557718"/>
+                  </a:lnTo>
+                  <a:lnTo>
+                    <a:pt x="1790563" y="2554929"/>
+                  </a:lnTo>
+                  <a:lnTo>
+                    <a:pt x="1718940" y="2552131"/>
+                  </a:lnTo>
+                  <a:lnTo>
+                    <a:pt x="1647318" y="2549324"/>
+                  </a:lnTo>
+                  <a:lnTo>
+                    <a:pt x="1575695" y="2546509"/>
+                  </a:lnTo>
+                  <a:lnTo>
+                    <a:pt x="1504073" y="2543686"/>
+                  </a:lnTo>
+                  <a:lnTo>
+                    <a:pt x="1432450" y="2540854"/>
+                  </a:lnTo>
+                  <a:lnTo>
+                    <a:pt x="1360827" y="2538013"/>
+                  </a:lnTo>
+                  <a:lnTo>
+                    <a:pt x="1289205" y="2535164"/>
+                  </a:lnTo>
+                  <a:lnTo>
+                    <a:pt x="1217582" y="2532307"/>
+                  </a:lnTo>
+                  <a:lnTo>
+                    <a:pt x="1145960" y="2529440"/>
+                  </a:lnTo>
+                  <a:lnTo>
+                    <a:pt x="1074337" y="2526565"/>
+                  </a:lnTo>
+                  <a:lnTo>
+                    <a:pt x="1002715" y="2523682"/>
+                  </a:lnTo>
+                  <a:lnTo>
+                    <a:pt x="931092" y="2520790"/>
+                  </a:lnTo>
+                  <a:lnTo>
+                    <a:pt x="859470" y="2517889"/>
+                  </a:lnTo>
+                  <a:lnTo>
+                    <a:pt x="787847" y="2514979"/>
+                  </a:lnTo>
+                  <a:lnTo>
+                    <a:pt x="716225" y="2512061"/>
+                  </a:lnTo>
+                  <a:lnTo>
+                    <a:pt x="644602" y="2509134"/>
+                  </a:lnTo>
+                  <a:lnTo>
+                    <a:pt x="572980" y="2506198"/>
+                  </a:lnTo>
+                  <a:lnTo>
+                    <a:pt x="501357" y="2503253"/>
+                  </a:lnTo>
+                  <a:lnTo>
+                    <a:pt x="429735" y="2500299"/>
+                  </a:lnTo>
+                  <a:lnTo>
+                    <a:pt x="358112" y="2497336"/>
+                  </a:lnTo>
+                  <a:lnTo>
+                    <a:pt x="286490" y="2494365"/>
+                  </a:lnTo>
+                  <a:lnTo>
+                    <a:pt x="214867" y="2491384"/>
+                  </a:lnTo>
+                  <a:lnTo>
+                    <a:pt x="143245" y="2488395"/>
+                  </a:lnTo>
+                  <a:lnTo>
+                    <a:pt x="71622" y="2485396"/>
+                  </a:lnTo>
+                  <a:lnTo>
+                    <a:pt x="0" y="2482389"/>
                   </a:lnTo>
                   <a:close/>
                 </a:path>
@@ -3466,231 +3463,228 @@
           </p:nvSpPr>
           <p:spPr>
             <a:xfrm>
-              <a:off x="3173049" y="2073503"/>
-              <a:ext cx="5089630" cy="2745897"/>
+              <a:off x="3184576" y="2073503"/>
+              <a:ext cx="5078103" cy="2740281"/>
             </a:xfrm>
             <a:custGeom>
               <a:avLst/>
               <a:pathLst>
-                <a:path w="5089630" h="2745897">
+                <a:path w="5078103" h="2740281">
                   <a:moveTo>
                     <a:pt x="0" y="0"/>
                   </a:moveTo>
                   <a:lnTo>
-                    <a:pt x="4431" y="9157"/>
-                  </a:lnTo>
-                  <a:lnTo>
-                    <a:pt x="76053" y="151123"/>
-                  </a:lnTo>
-                  <a:lnTo>
-                    <a:pt x="147676" y="287289"/>
-                  </a:lnTo>
-                  <a:lnTo>
-                    <a:pt x="219298" y="417891"/>
-                  </a:lnTo>
-                  <a:lnTo>
-                    <a:pt x="290921" y="543158"/>
-                  </a:lnTo>
-                  <a:lnTo>
-                    <a:pt x="362543" y="663305"/>
-                  </a:lnTo>
-                  <a:lnTo>
-                    <a:pt x="434166" y="778544"/>
-                  </a:lnTo>
-                  <a:lnTo>
-                    <a:pt x="505788" y="889075"/>
-                  </a:lnTo>
-                  <a:lnTo>
-                    <a:pt x="577411" y="995089"/>
-                  </a:lnTo>
-                  <a:lnTo>
-                    <a:pt x="649033" y="1096772"/>
-                  </a:lnTo>
-                  <a:lnTo>
-                    <a:pt x="720656" y="1194300"/>
-                  </a:lnTo>
-                  <a:lnTo>
-                    <a:pt x="792278" y="1287843"/>
-                  </a:lnTo>
-                  <a:lnTo>
-                    <a:pt x="863901" y="1377565"/>
-                  </a:lnTo>
-                  <a:lnTo>
-                    <a:pt x="935523" y="1463620"/>
-                  </a:lnTo>
-                  <a:lnTo>
-                    <a:pt x="1007146" y="1546159"/>
-                  </a:lnTo>
-                  <a:lnTo>
-                    <a:pt x="1078768" y="1625326"/>
-                  </a:lnTo>
-                  <a:lnTo>
-                    <a:pt x="1150391" y="1701258"/>
-                  </a:lnTo>
-                  <a:lnTo>
-                    <a:pt x="1222014" y="1774088"/>
-                  </a:lnTo>
-                  <a:lnTo>
-                    <a:pt x="1293636" y="1843942"/>
-                  </a:lnTo>
-                  <a:lnTo>
-                    <a:pt x="1365259" y="1910942"/>
-                  </a:lnTo>
-                  <a:lnTo>
-                    <a:pt x="1436881" y="1975204"/>
-                  </a:lnTo>
-                  <a:lnTo>
-                    <a:pt x="1508504" y="2036841"/>
-                  </a:lnTo>
-                  <a:lnTo>
-                    <a:pt x="1580126" y="2095959"/>
-                  </a:lnTo>
-                  <a:lnTo>
-                    <a:pt x="1651749" y="2152662"/>
-                  </a:lnTo>
-                  <a:lnTo>
-                    <a:pt x="1723371" y="2207048"/>
-                  </a:lnTo>
-                  <a:lnTo>
-                    <a:pt x="1794994" y="2259212"/>
-                  </a:lnTo>
-                  <a:lnTo>
-                    <a:pt x="1866616" y="2309245"/>
-                  </a:lnTo>
-                  <a:lnTo>
-                    <a:pt x="1938239" y="2357233"/>
-                  </a:lnTo>
-                  <a:lnTo>
-                    <a:pt x="2009861" y="2403261"/>
-                  </a:lnTo>
-                  <a:lnTo>
-                    <a:pt x="2081484" y="2447408"/>
-                  </a:lnTo>
-                  <a:lnTo>
-                    <a:pt x="2153106" y="2489751"/>
-                  </a:lnTo>
-                  <a:lnTo>
-                    <a:pt x="2224729" y="2530364"/>
-                  </a:lnTo>
-                  <a:lnTo>
-                    <a:pt x="2296351" y="2569318"/>
-                  </a:lnTo>
-                  <a:lnTo>
-                    <a:pt x="2367974" y="2606680"/>
-                  </a:lnTo>
-                  <a:lnTo>
-                    <a:pt x="2439596" y="2642516"/>
-                  </a:lnTo>
-                  <a:lnTo>
-                    <a:pt x="2511219" y="2656035"/>
-                  </a:lnTo>
-                  <a:lnTo>
-                    <a:pt x="2582842" y="2658673"/>
-                  </a:lnTo>
-                  <a:lnTo>
-                    <a:pt x="2654464" y="2661303"/>
-                  </a:lnTo>
-                  <a:lnTo>
-                    <a:pt x="2726087" y="2663924"/>
-                  </a:lnTo>
-                  <a:lnTo>
-                    <a:pt x="2797709" y="2666537"/>
-                  </a:lnTo>
-                  <a:lnTo>
-                    <a:pt x="2869332" y="2669142"/>
-                  </a:lnTo>
-                  <a:lnTo>
-                    <a:pt x="2940954" y="2671738"/>
-                  </a:lnTo>
-                  <a:lnTo>
-                    <a:pt x="3012577" y="2674326"/>
-                  </a:lnTo>
-                  <a:lnTo>
-                    <a:pt x="3084199" y="2676906"/>
-                  </a:lnTo>
-                  <a:lnTo>
-                    <a:pt x="3155822" y="2679478"/>
-                  </a:lnTo>
-                  <a:lnTo>
-                    <a:pt x="3227444" y="2682041"/>
-                  </a:lnTo>
-                  <a:lnTo>
-                    <a:pt x="3299067" y="2684596"/>
-                  </a:lnTo>
-                  <a:lnTo>
-                    <a:pt x="3370689" y="2687144"/>
-                  </a:lnTo>
-                  <a:lnTo>
-                    <a:pt x="3442312" y="2689683"/>
-                  </a:lnTo>
-                  <a:lnTo>
-                    <a:pt x="3513934" y="2692213"/>
-                  </a:lnTo>
-                  <a:lnTo>
-                    <a:pt x="3585557" y="2694736"/>
-                  </a:lnTo>
-                  <a:lnTo>
-                    <a:pt x="3657179" y="2697251"/>
-                  </a:lnTo>
-                  <a:lnTo>
-                    <a:pt x="3728802" y="2699758"/>
-                  </a:lnTo>
-                  <a:lnTo>
-                    <a:pt x="3800424" y="2702257"/>
-                  </a:lnTo>
-                  <a:lnTo>
-                    <a:pt x="3872047" y="2704748"/>
-                  </a:lnTo>
-                  <a:lnTo>
-                    <a:pt x="3943670" y="2707230"/>
-                  </a:lnTo>
-                  <a:lnTo>
-                    <a:pt x="4015292" y="2709705"/>
-                  </a:lnTo>
-                  <a:lnTo>
-                    <a:pt x="4086915" y="2712173"/>
-                  </a:lnTo>
-                  <a:lnTo>
-                    <a:pt x="4158537" y="2714632"/>
-                  </a:lnTo>
-                  <a:lnTo>
-                    <a:pt x="4230160" y="2717083"/>
-                  </a:lnTo>
-                  <a:lnTo>
-                    <a:pt x="4301782" y="2719527"/>
-                  </a:lnTo>
-                  <a:lnTo>
-                    <a:pt x="4373405" y="2721962"/>
-                  </a:lnTo>
-                  <a:lnTo>
-                    <a:pt x="4445027" y="2724391"/>
-                  </a:lnTo>
-                  <a:lnTo>
-                    <a:pt x="4516650" y="2726811"/>
-                  </a:lnTo>
-                  <a:lnTo>
-                    <a:pt x="4588272" y="2729223"/>
-                  </a:lnTo>
-                  <a:lnTo>
-                    <a:pt x="4659895" y="2731628"/>
-                  </a:lnTo>
-                  <a:lnTo>
-                    <a:pt x="4731517" y="2734025"/>
-                  </a:lnTo>
-                  <a:lnTo>
-                    <a:pt x="4803140" y="2736415"/>
-                  </a:lnTo>
-                  <a:lnTo>
-                    <a:pt x="4874762" y="2738797"/>
-                  </a:lnTo>
-                  <a:lnTo>
-                    <a:pt x="4946385" y="2741171"/>
-                  </a:lnTo>
-                  <a:lnTo>
-                    <a:pt x="5018007" y="2743538"/>
-                  </a:lnTo>
-                  <a:lnTo>
-                    <a:pt x="5089630" y="2745897"/>
+                    <a:pt x="64526" y="128344"/>
+                  </a:lnTo>
+                  <a:lnTo>
+                    <a:pt x="136149" y="265001"/>
+                  </a:lnTo>
+                  <a:lnTo>
+                    <a:pt x="207771" y="396092"/>
+                  </a:lnTo>
+                  <a:lnTo>
+                    <a:pt x="279394" y="521845"/>
+                  </a:lnTo>
+                  <a:lnTo>
+                    <a:pt x="351016" y="642475"/>
+                  </a:lnTo>
+                  <a:lnTo>
+                    <a:pt x="422639" y="758193"/>
+                  </a:lnTo>
+                  <a:lnTo>
+                    <a:pt x="494261" y="869198"/>
+                  </a:lnTo>
+                  <a:lnTo>
+                    <a:pt x="565884" y="975682"/>
+                  </a:lnTo>
+                  <a:lnTo>
+                    <a:pt x="637506" y="1077829"/>
+                  </a:lnTo>
+                  <a:lnTo>
+                    <a:pt x="709129" y="1175815"/>
+                  </a:lnTo>
+                  <a:lnTo>
+                    <a:pt x="780751" y="1269811"/>
+                  </a:lnTo>
+                  <a:lnTo>
+                    <a:pt x="852374" y="1359979"/>
+                  </a:lnTo>
+                  <a:lnTo>
+                    <a:pt x="923996" y="1446475"/>
+                  </a:lnTo>
+                  <a:lnTo>
+                    <a:pt x="995619" y="1529448"/>
+                  </a:lnTo>
+                  <a:lnTo>
+                    <a:pt x="1067241" y="1609041"/>
+                  </a:lnTo>
+                  <a:lnTo>
+                    <a:pt x="1138864" y="1685393"/>
+                  </a:lnTo>
+                  <a:lnTo>
+                    <a:pt x="1210486" y="1758636"/>
+                  </a:lnTo>
+                  <a:lnTo>
+                    <a:pt x="1282109" y="1828895"/>
+                  </a:lnTo>
+                  <a:lnTo>
+                    <a:pt x="1353731" y="1896293"/>
+                  </a:lnTo>
+                  <a:lnTo>
+                    <a:pt x="1425354" y="1960946"/>
+                  </a:lnTo>
+                  <a:lnTo>
+                    <a:pt x="1496977" y="2022965"/>
+                  </a:lnTo>
+                  <a:lnTo>
+                    <a:pt x="1568599" y="2082459"/>
+                  </a:lnTo>
+                  <a:lnTo>
+                    <a:pt x="1640222" y="2139530"/>
+                  </a:lnTo>
+                  <a:lnTo>
+                    <a:pt x="1711844" y="2194276"/>
+                  </a:lnTo>
+                  <a:lnTo>
+                    <a:pt x="1783467" y="2246793"/>
+                  </a:lnTo>
+                  <a:lnTo>
+                    <a:pt x="1855089" y="2297171"/>
+                  </a:lnTo>
+                  <a:lnTo>
+                    <a:pt x="1926712" y="2345497"/>
+                  </a:lnTo>
+                  <a:lnTo>
+                    <a:pt x="1998334" y="2391855"/>
+                  </a:lnTo>
+                  <a:lnTo>
+                    <a:pt x="2069957" y="2436325"/>
+                  </a:lnTo>
+                  <a:lnTo>
+                    <a:pt x="2141579" y="2478984"/>
+                  </a:lnTo>
+                  <a:lnTo>
+                    <a:pt x="2213202" y="2519905"/>
+                  </a:lnTo>
+                  <a:lnTo>
+                    <a:pt x="2284824" y="2559160"/>
+                  </a:lnTo>
+                  <a:lnTo>
+                    <a:pt x="2356447" y="2596816"/>
+                  </a:lnTo>
+                  <a:lnTo>
+                    <a:pt x="2428069" y="2632939"/>
+                  </a:lnTo>
+                  <a:lnTo>
+                    <a:pt x="2499692" y="2655253"/>
+                  </a:lnTo>
+                  <a:lnTo>
+                    <a:pt x="2571314" y="2657741"/>
+                  </a:lnTo>
+                  <a:lnTo>
+                    <a:pt x="2642937" y="2660222"/>
+                  </a:lnTo>
+                  <a:lnTo>
+                    <a:pt x="2714559" y="2662695"/>
+                  </a:lnTo>
+                  <a:lnTo>
+                    <a:pt x="2786182" y="2665161"/>
+                  </a:lnTo>
+                  <a:lnTo>
+                    <a:pt x="2857805" y="2667620"/>
+                  </a:lnTo>
+                  <a:lnTo>
+                    <a:pt x="2929427" y="2670071"/>
+                  </a:lnTo>
+                  <a:lnTo>
+                    <a:pt x="3001050" y="2672515"/>
+                  </a:lnTo>
+                  <a:lnTo>
+                    <a:pt x="3072672" y="2674952"/>
+                  </a:lnTo>
+                  <a:lnTo>
+                    <a:pt x="3144295" y="2677381"/>
+                  </a:lnTo>
+                  <a:lnTo>
+                    <a:pt x="3215917" y="2679803"/>
+                  </a:lnTo>
+                  <a:lnTo>
+                    <a:pt x="3287540" y="2682217"/>
+                  </a:lnTo>
+                  <a:lnTo>
+                    <a:pt x="3359162" y="2684625"/>
+                  </a:lnTo>
+                  <a:lnTo>
+                    <a:pt x="3430785" y="2687025"/>
+                  </a:lnTo>
+                  <a:lnTo>
+                    <a:pt x="3502407" y="2689418"/>
+                  </a:lnTo>
+                  <a:lnTo>
+                    <a:pt x="3574030" y="2691803"/>
+                  </a:lnTo>
+                  <a:lnTo>
+                    <a:pt x="3645652" y="2694182"/>
+                  </a:lnTo>
+                  <a:lnTo>
+                    <a:pt x="3717275" y="2696553"/>
+                  </a:lnTo>
+                  <a:lnTo>
+                    <a:pt x="3788897" y="2698918"/>
+                  </a:lnTo>
+                  <a:lnTo>
+                    <a:pt x="3860520" y="2701275"/>
+                  </a:lnTo>
+                  <a:lnTo>
+                    <a:pt x="3932142" y="2703625"/>
+                  </a:lnTo>
+                  <a:lnTo>
+                    <a:pt x="4003765" y="2705968"/>
+                  </a:lnTo>
+                  <a:lnTo>
+                    <a:pt x="4075387" y="2708304"/>
+                  </a:lnTo>
+                  <a:lnTo>
+                    <a:pt x="4147010" y="2710633"/>
+                  </a:lnTo>
+                  <a:lnTo>
+                    <a:pt x="4218633" y="2712955"/>
+                  </a:lnTo>
+                  <a:lnTo>
+                    <a:pt x="4290255" y="2715270"/>
+                  </a:lnTo>
+                  <a:lnTo>
+                    <a:pt x="4361878" y="2717578"/>
+                  </a:lnTo>
+                  <a:lnTo>
+                    <a:pt x="4433500" y="2719879"/>
+                  </a:lnTo>
+                  <a:lnTo>
+                    <a:pt x="4505123" y="2722174"/>
+                  </a:lnTo>
+                  <a:lnTo>
+                    <a:pt x="4576745" y="2724461"/>
+                  </a:lnTo>
+                  <a:lnTo>
+                    <a:pt x="4648368" y="2726742"/>
+                  </a:lnTo>
+                  <a:lnTo>
+                    <a:pt x="4719990" y="2729015"/>
+                  </a:lnTo>
+                  <a:lnTo>
+                    <a:pt x="4791613" y="2731282"/>
+                  </a:lnTo>
+                  <a:lnTo>
+                    <a:pt x="4863235" y="2733542"/>
+                  </a:lnTo>
+                  <a:lnTo>
+                    <a:pt x="4934858" y="2735795"/>
+                  </a:lnTo>
+                  <a:lnTo>
+                    <a:pt x="5006480" y="2738042"/>
+                  </a:lnTo>
+                  <a:lnTo>
+                    <a:pt x="5078103" y="2740281"/>
                   </a:lnTo>
                 </a:path>
               </a:pathLst>
@@ -3710,309 +3704,309 @@
           </p:nvSpPr>
           <p:spPr>
             <a:xfrm>
-              <a:off x="1172049" y="4545147"/>
-              <a:ext cx="7090630" cy="832390"/>
+              <a:off x="1172049" y="4555892"/>
+              <a:ext cx="7090630" cy="818679"/>
             </a:xfrm>
             <a:custGeom>
               <a:avLst/>
               <a:pathLst>
-                <a:path w="7090630" h="832390">
+                <a:path w="7090630" h="818679">
                   <a:moveTo>
-                    <a:pt x="7090630" y="832390"/>
+                    <a:pt x="7090630" y="818679"/>
                   </a:moveTo>
                   <a:lnTo>
-                    <a:pt x="7019007" y="824735"/>
-                  </a:lnTo>
-                  <a:lnTo>
-                    <a:pt x="6947385" y="816753"/>
-                  </a:lnTo>
-                  <a:lnTo>
-                    <a:pt x="6875762" y="808432"/>
-                  </a:lnTo>
-                  <a:lnTo>
-                    <a:pt x="6804139" y="799756"/>
-                  </a:lnTo>
-                  <a:lnTo>
-                    <a:pt x="6732517" y="790710"/>
-                  </a:lnTo>
-                  <a:lnTo>
-                    <a:pt x="6660894" y="781279"/>
-                  </a:lnTo>
-                  <a:lnTo>
-                    <a:pt x="6589272" y="771446"/>
-                  </a:lnTo>
-                  <a:lnTo>
-                    <a:pt x="6517649" y="761194"/>
-                  </a:lnTo>
-                  <a:lnTo>
-                    <a:pt x="6446027" y="750506"/>
-                  </a:lnTo>
-                  <a:lnTo>
-                    <a:pt x="6374404" y="739362"/>
-                  </a:lnTo>
-                  <a:lnTo>
-                    <a:pt x="6302782" y="727744"/>
-                  </a:lnTo>
-                  <a:lnTo>
-                    <a:pt x="6231159" y="715630"/>
-                  </a:lnTo>
-                  <a:lnTo>
-                    <a:pt x="6159537" y="703001"/>
-                  </a:lnTo>
-                  <a:lnTo>
-                    <a:pt x="6087914" y="689834"/>
-                  </a:lnTo>
-                  <a:lnTo>
-                    <a:pt x="6016292" y="676105"/>
-                  </a:lnTo>
-                  <a:lnTo>
-                    <a:pt x="5944669" y="661792"/>
-                  </a:lnTo>
-                  <a:lnTo>
-                    <a:pt x="5873047" y="646869"/>
-                  </a:lnTo>
-                  <a:lnTo>
-                    <a:pt x="5801424" y="631311"/>
-                  </a:lnTo>
-                  <a:lnTo>
-                    <a:pt x="5729802" y="615089"/>
-                  </a:lnTo>
-                  <a:lnTo>
-                    <a:pt x="5658179" y="598177"/>
-                  </a:lnTo>
-                  <a:lnTo>
-                    <a:pt x="5586557" y="580544"/>
-                  </a:lnTo>
-                  <a:lnTo>
-                    <a:pt x="5514934" y="562160"/>
-                  </a:lnTo>
-                  <a:lnTo>
-                    <a:pt x="5443311" y="542993"/>
-                  </a:lnTo>
-                  <a:lnTo>
-                    <a:pt x="5371689" y="523010"/>
-                  </a:lnTo>
-                  <a:lnTo>
-                    <a:pt x="5300066" y="502175"/>
-                  </a:lnTo>
-                  <a:lnTo>
-                    <a:pt x="5228444" y="480453"/>
-                  </a:lnTo>
-                  <a:lnTo>
-                    <a:pt x="5156821" y="457805"/>
-                  </a:lnTo>
-                  <a:lnTo>
-                    <a:pt x="5085199" y="434193"/>
-                  </a:lnTo>
-                  <a:lnTo>
-                    <a:pt x="5013576" y="409574"/>
-                  </a:lnTo>
-                  <a:lnTo>
-                    <a:pt x="4941954" y="383907"/>
-                  </a:lnTo>
-                  <a:lnTo>
-                    <a:pt x="4870331" y="357147"/>
-                  </a:lnTo>
-                  <a:lnTo>
-                    <a:pt x="4798709" y="329246"/>
-                  </a:lnTo>
-                  <a:lnTo>
-                    <a:pt x="4727086" y="300157"/>
-                  </a:lnTo>
-                  <a:lnTo>
-                    <a:pt x="4655464" y="269829"/>
-                  </a:lnTo>
-                  <a:lnTo>
-                    <a:pt x="4583841" y="238209"/>
-                  </a:lnTo>
-                  <a:lnTo>
-                    <a:pt x="4512219" y="205242"/>
-                  </a:lnTo>
-                  <a:lnTo>
-                    <a:pt x="4440596" y="181743"/>
-                  </a:lnTo>
-                  <a:lnTo>
-                    <a:pt x="4368974" y="179088"/>
-                  </a:lnTo>
-                  <a:lnTo>
-                    <a:pt x="4297351" y="176425"/>
-                  </a:lnTo>
-                  <a:lnTo>
-                    <a:pt x="4225729" y="173753"/>
-                  </a:lnTo>
-                  <a:lnTo>
-                    <a:pt x="4154106" y="171072"/>
-                  </a:lnTo>
-                  <a:lnTo>
-                    <a:pt x="4082483" y="168383"/>
-                  </a:lnTo>
-                  <a:lnTo>
-                    <a:pt x="4010861" y="165685"/>
-                  </a:lnTo>
-                  <a:lnTo>
-                    <a:pt x="3939238" y="162979"/>
-                  </a:lnTo>
-                  <a:lnTo>
-                    <a:pt x="3867616" y="160264"/>
-                  </a:lnTo>
-                  <a:lnTo>
-                    <a:pt x="3795993" y="157540"/>
-                  </a:lnTo>
-                  <a:lnTo>
-                    <a:pt x="3724371" y="154807"/>
-                  </a:lnTo>
-                  <a:lnTo>
-                    <a:pt x="3652748" y="152066"/>
-                  </a:lnTo>
-                  <a:lnTo>
-                    <a:pt x="3581126" y="149316"/>
-                  </a:lnTo>
-                  <a:lnTo>
-                    <a:pt x="3509503" y="146558"/>
-                  </a:lnTo>
-                  <a:lnTo>
-                    <a:pt x="3437881" y="143790"/>
-                  </a:lnTo>
-                  <a:lnTo>
-                    <a:pt x="3366258" y="141014"/>
-                  </a:lnTo>
-                  <a:lnTo>
-                    <a:pt x="3294636" y="138228"/>
-                  </a:lnTo>
-                  <a:lnTo>
-                    <a:pt x="3223013" y="135434"/>
-                  </a:lnTo>
-                  <a:lnTo>
-                    <a:pt x="3151391" y="132631"/>
-                  </a:lnTo>
-                  <a:lnTo>
-                    <a:pt x="3079768" y="129819"/>
-                  </a:lnTo>
-                  <a:lnTo>
-                    <a:pt x="3008146" y="126998"/>
-                  </a:lnTo>
-                  <a:lnTo>
-                    <a:pt x="2936523" y="124168"/>
-                  </a:lnTo>
-                  <a:lnTo>
-                    <a:pt x="2864901" y="121329"/>
-                  </a:lnTo>
-                  <a:lnTo>
-                    <a:pt x="2793278" y="118480"/>
-                  </a:lnTo>
-                  <a:lnTo>
-                    <a:pt x="2721655" y="115623"/>
-                  </a:lnTo>
-                  <a:lnTo>
-                    <a:pt x="2650033" y="112757"/>
-                  </a:lnTo>
-                  <a:lnTo>
-                    <a:pt x="2578410" y="109881"/>
-                  </a:lnTo>
-                  <a:lnTo>
-                    <a:pt x="2506788" y="106996"/>
-                  </a:lnTo>
-                  <a:lnTo>
-                    <a:pt x="2435165" y="104102"/>
-                  </a:lnTo>
-                  <a:lnTo>
-                    <a:pt x="2363543" y="101199"/>
-                  </a:lnTo>
-                  <a:lnTo>
-                    <a:pt x="2291920" y="98286"/>
-                  </a:lnTo>
-                  <a:lnTo>
-                    <a:pt x="2220298" y="95364"/>
-                  </a:lnTo>
-                  <a:lnTo>
-                    <a:pt x="2148675" y="92433"/>
-                  </a:lnTo>
-                  <a:lnTo>
-                    <a:pt x="2077053" y="89492"/>
-                  </a:lnTo>
-                  <a:lnTo>
-                    <a:pt x="2005430" y="86542"/>
-                  </a:lnTo>
-                  <a:lnTo>
-                    <a:pt x="1933808" y="83583"/>
-                  </a:lnTo>
-                  <a:lnTo>
-                    <a:pt x="1862185" y="80614"/>
-                  </a:lnTo>
-                  <a:lnTo>
-                    <a:pt x="1790563" y="77636"/>
-                  </a:lnTo>
-                  <a:lnTo>
-                    <a:pt x="1718940" y="74648"/>
-                  </a:lnTo>
-                  <a:lnTo>
-                    <a:pt x="1647318" y="71650"/>
-                  </a:lnTo>
-                  <a:lnTo>
-                    <a:pt x="1575695" y="68643"/>
-                  </a:lnTo>
-                  <a:lnTo>
-                    <a:pt x="1504073" y="65626"/>
-                  </a:lnTo>
-                  <a:lnTo>
-                    <a:pt x="1432450" y="62600"/>
-                  </a:lnTo>
-                  <a:lnTo>
-                    <a:pt x="1360827" y="59564"/>
-                  </a:lnTo>
-                  <a:lnTo>
-                    <a:pt x="1289205" y="56518"/>
-                  </a:lnTo>
-                  <a:lnTo>
-                    <a:pt x="1217582" y="53463"/>
-                  </a:lnTo>
-                  <a:lnTo>
-                    <a:pt x="1145960" y="50398"/>
-                  </a:lnTo>
-                  <a:lnTo>
-                    <a:pt x="1074337" y="47323"/>
-                  </a:lnTo>
-                  <a:lnTo>
-                    <a:pt x="1002715" y="44238"/>
-                  </a:lnTo>
-                  <a:lnTo>
-                    <a:pt x="931092" y="41143"/>
-                  </a:lnTo>
-                  <a:lnTo>
-                    <a:pt x="859470" y="38038"/>
-                  </a:lnTo>
-                  <a:lnTo>
-                    <a:pt x="787847" y="34924"/>
-                  </a:lnTo>
-                  <a:lnTo>
-                    <a:pt x="716225" y="31799"/>
-                  </a:lnTo>
-                  <a:lnTo>
-                    <a:pt x="644602" y="28665"/>
-                  </a:lnTo>
-                  <a:lnTo>
-                    <a:pt x="572980" y="25520"/>
-                  </a:lnTo>
-                  <a:lnTo>
-                    <a:pt x="501357" y="22366"/>
-                  </a:lnTo>
-                  <a:lnTo>
-                    <a:pt x="429735" y="19201"/>
-                  </a:lnTo>
-                  <a:lnTo>
-                    <a:pt x="358112" y="16026"/>
-                  </a:lnTo>
-                  <a:lnTo>
-                    <a:pt x="286490" y="12841"/>
-                  </a:lnTo>
-                  <a:lnTo>
-                    <a:pt x="214867" y="9646"/>
-                  </a:lnTo>
-                  <a:lnTo>
-                    <a:pt x="143245" y="6441"/>
-                  </a:lnTo>
-                  <a:lnTo>
-                    <a:pt x="71622" y="3225"/>
+                    <a:pt x="7019007" y="810923"/>
+                  </a:lnTo>
+                  <a:lnTo>
+                    <a:pt x="6947385" y="802838"/>
+                  </a:lnTo>
+                  <a:lnTo>
+                    <a:pt x="6875762" y="794410"/>
+                  </a:lnTo>
+                  <a:lnTo>
+                    <a:pt x="6804139" y="785623"/>
+                  </a:lnTo>
+                  <a:lnTo>
+                    <a:pt x="6732517" y="776464"/>
+                  </a:lnTo>
+                  <a:lnTo>
+                    <a:pt x="6660894" y="766916"/>
+                  </a:lnTo>
+                  <a:lnTo>
+                    <a:pt x="6589272" y="756962"/>
+                  </a:lnTo>
+                  <a:lnTo>
+                    <a:pt x="6517649" y="746586"/>
+                  </a:lnTo>
+                  <a:lnTo>
+                    <a:pt x="6446027" y="735769"/>
+                  </a:lnTo>
+                  <a:lnTo>
+                    <a:pt x="6374404" y="724493"/>
+                  </a:lnTo>
+                  <a:lnTo>
+                    <a:pt x="6302782" y="712739"/>
+                  </a:lnTo>
+                  <a:lnTo>
+                    <a:pt x="6231159" y="700485"/>
+                  </a:lnTo>
+                  <a:lnTo>
+                    <a:pt x="6159537" y="687711"/>
+                  </a:lnTo>
+                  <a:lnTo>
+                    <a:pt x="6087914" y="674395"/>
+                  </a:lnTo>
+                  <a:lnTo>
+                    <a:pt x="6016292" y="660513"/>
+                  </a:lnTo>
+                  <a:lnTo>
+                    <a:pt x="5944669" y="646042"/>
+                  </a:lnTo>
+                  <a:lnTo>
+                    <a:pt x="5873047" y="630956"/>
+                  </a:lnTo>
+                  <a:lnTo>
+                    <a:pt x="5801424" y="615230"/>
+                  </a:lnTo>
+                  <a:lnTo>
+                    <a:pt x="5729802" y="598837"/>
+                  </a:lnTo>
+                  <a:lnTo>
+                    <a:pt x="5658179" y="581747"/>
+                  </a:lnTo>
+                  <a:lnTo>
+                    <a:pt x="5586557" y="563932"/>
+                  </a:lnTo>
+                  <a:lnTo>
+                    <a:pt x="5514934" y="545360"/>
+                  </a:lnTo>
+                  <a:lnTo>
+                    <a:pt x="5443311" y="526000"/>
+                  </a:lnTo>
+                  <a:lnTo>
+                    <a:pt x="5371689" y="505818"/>
+                  </a:lnTo>
+                  <a:lnTo>
+                    <a:pt x="5300066" y="484779"/>
+                  </a:lnTo>
+                  <a:lnTo>
+                    <a:pt x="5228444" y="462847"/>
+                  </a:lnTo>
+                  <a:lnTo>
+                    <a:pt x="5156821" y="439984"/>
+                  </a:lnTo>
+                  <a:lnTo>
+                    <a:pt x="5085199" y="416150"/>
+                  </a:lnTo>
+                  <a:lnTo>
+                    <a:pt x="5013576" y="391304"/>
+                  </a:lnTo>
+                  <a:lnTo>
+                    <a:pt x="4941954" y="365403"/>
+                  </a:lnTo>
+                  <a:lnTo>
+                    <a:pt x="4870331" y="338403"/>
+                  </a:lnTo>
+                  <a:lnTo>
+                    <a:pt x="4798709" y="310256"/>
+                  </a:lnTo>
+                  <a:lnTo>
+                    <a:pt x="4727086" y="280914"/>
+                  </a:lnTo>
+                  <a:lnTo>
+                    <a:pt x="4655464" y="250327"/>
+                  </a:lnTo>
+                  <a:lnTo>
+                    <a:pt x="4583841" y="218441"/>
+                  </a:lnTo>
+                  <a:lnTo>
+                    <a:pt x="4512219" y="185201"/>
+                  </a:lnTo>
+                  <a:lnTo>
+                    <a:pt x="4440596" y="170368"/>
+                  </a:lnTo>
+                  <a:lnTo>
+                    <a:pt x="4368974" y="167864"/>
+                  </a:lnTo>
+                  <a:lnTo>
+                    <a:pt x="4297351" y="165354"/>
+                  </a:lnTo>
+                  <a:lnTo>
+                    <a:pt x="4225729" y="162835"/>
+                  </a:lnTo>
+                  <a:lnTo>
+                    <a:pt x="4154106" y="160309"/>
+                  </a:lnTo>
+                  <a:lnTo>
+                    <a:pt x="4082483" y="157775"/>
+                  </a:lnTo>
+                  <a:lnTo>
+                    <a:pt x="4010861" y="155234"/>
+                  </a:lnTo>
+                  <a:lnTo>
+                    <a:pt x="3939238" y="152685"/>
+                  </a:lnTo>
+                  <a:lnTo>
+                    <a:pt x="3867616" y="150128"/>
+                  </a:lnTo>
+                  <a:lnTo>
+                    <a:pt x="3795993" y="147564"/>
+                  </a:lnTo>
+                  <a:lnTo>
+                    <a:pt x="3724371" y="144992"/>
+                  </a:lnTo>
+                  <a:lnTo>
+                    <a:pt x="3652748" y="142412"/>
+                  </a:lnTo>
+                  <a:lnTo>
+                    <a:pt x="3581126" y="139825"/>
+                  </a:lnTo>
+                  <a:lnTo>
+                    <a:pt x="3509503" y="137229"/>
+                  </a:lnTo>
+                  <a:lnTo>
+                    <a:pt x="3437881" y="134626"/>
+                  </a:lnTo>
+                  <a:lnTo>
+                    <a:pt x="3366258" y="132015"/>
+                  </a:lnTo>
+                  <a:lnTo>
+                    <a:pt x="3294636" y="129396"/>
+                  </a:lnTo>
+                  <a:lnTo>
+                    <a:pt x="3223013" y="126769"/>
+                  </a:lnTo>
+                  <a:lnTo>
+                    <a:pt x="3151391" y="124135"/>
+                  </a:lnTo>
+                  <a:lnTo>
+                    <a:pt x="3079768" y="121492"/>
+                  </a:lnTo>
+                  <a:lnTo>
+                    <a:pt x="3008146" y="118841"/>
+                  </a:lnTo>
+                  <a:lnTo>
+                    <a:pt x="2936523" y="116183"/>
+                  </a:lnTo>
+                  <a:lnTo>
+                    <a:pt x="2864901" y="113516"/>
+                  </a:lnTo>
+                  <a:lnTo>
+                    <a:pt x="2793278" y="110842"/>
+                  </a:lnTo>
+                  <a:lnTo>
+                    <a:pt x="2721655" y="108159"/>
+                  </a:lnTo>
+                  <a:lnTo>
+                    <a:pt x="2650033" y="105468"/>
+                  </a:lnTo>
+                  <a:lnTo>
+                    <a:pt x="2578410" y="102769"/>
+                  </a:lnTo>
+                  <a:lnTo>
+                    <a:pt x="2506788" y="100062"/>
+                  </a:lnTo>
+                  <a:lnTo>
+                    <a:pt x="2435165" y="97347"/>
+                  </a:lnTo>
+                  <a:lnTo>
+                    <a:pt x="2363543" y="94624"/>
+                  </a:lnTo>
+                  <a:lnTo>
+                    <a:pt x="2291920" y="91892"/>
+                  </a:lnTo>
+                  <a:lnTo>
+                    <a:pt x="2220298" y="89152"/>
+                  </a:lnTo>
+                  <a:lnTo>
+                    <a:pt x="2148675" y="86404"/>
+                  </a:lnTo>
+                  <a:lnTo>
+                    <a:pt x="2077053" y="83648"/>
+                  </a:lnTo>
+                  <a:lnTo>
+                    <a:pt x="2005430" y="80883"/>
+                  </a:lnTo>
+                  <a:lnTo>
+                    <a:pt x="1933808" y="78111"/>
+                  </a:lnTo>
+                  <a:lnTo>
+                    <a:pt x="1862185" y="75329"/>
+                  </a:lnTo>
+                  <a:lnTo>
+                    <a:pt x="1790563" y="72540"/>
+                  </a:lnTo>
+                  <a:lnTo>
+                    <a:pt x="1718940" y="69741"/>
+                  </a:lnTo>
+                  <a:lnTo>
+                    <a:pt x="1647318" y="66935"/>
+                  </a:lnTo>
+                  <a:lnTo>
+                    <a:pt x="1575695" y="64120"/>
+                  </a:lnTo>
+                  <a:lnTo>
+                    <a:pt x="1504073" y="61297"/>
+                  </a:lnTo>
+                  <a:lnTo>
+                    <a:pt x="1432450" y="58465"/>
+                  </a:lnTo>
+                  <a:lnTo>
+                    <a:pt x="1360827" y="55624"/>
+                  </a:lnTo>
+                  <a:lnTo>
+                    <a:pt x="1289205" y="52775"/>
+                  </a:lnTo>
+                  <a:lnTo>
+                    <a:pt x="1217582" y="49917"/>
+                  </a:lnTo>
+                  <a:lnTo>
+                    <a:pt x="1145960" y="47051"/>
+                  </a:lnTo>
+                  <a:lnTo>
+                    <a:pt x="1074337" y="44176"/>
+                  </a:lnTo>
+                  <a:lnTo>
+                    <a:pt x="1002715" y="41293"/>
+                  </a:lnTo>
+                  <a:lnTo>
+                    <a:pt x="931092" y="38401"/>
+                  </a:lnTo>
+                  <a:lnTo>
+                    <a:pt x="859470" y="35500"/>
+                  </a:lnTo>
+                  <a:lnTo>
+                    <a:pt x="787847" y="32590"/>
+                  </a:lnTo>
+                  <a:lnTo>
+                    <a:pt x="716225" y="29672"/>
+                  </a:lnTo>
+                  <a:lnTo>
+                    <a:pt x="644602" y="26744"/>
+                  </a:lnTo>
+                  <a:lnTo>
+                    <a:pt x="572980" y="23808"/>
+                  </a:lnTo>
+                  <a:lnTo>
+                    <a:pt x="501357" y="20864"/>
+                  </a:lnTo>
+                  <a:lnTo>
+                    <a:pt x="429735" y="17910"/>
+                  </a:lnTo>
+                  <a:lnTo>
+                    <a:pt x="358112" y="14947"/>
+                  </a:lnTo>
+                  <a:lnTo>
+                    <a:pt x="286490" y="11976"/>
+                  </a:lnTo>
+                  <a:lnTo>
+                    <a:pt x="214867" y="8995"/>
+                  </a:lnTo>
+                  <a:lnTo>
+                    <a:pt x="143245" y="6006"/>
+                  </a:lnTo>
+                  <a:lnTo>
+                    <a:pt x="71622" y="3007"/>
                   </a:lnTo>
                   <a:lnTo>
                     <a:pt x="0" y="0"/>
@@ -4035,312 +4029,312 @@
           </p:nvSpPr>
           <p:spPr>
             <a:xfrm>
-              <a:off x="1172049" y="2194410"/>
-              <a:ext cx="7090630" cy="2998697"/>
+              <a:off x="1172049" y="2207537"/>
+              <a:ext cx="7090630" cy="2981181"/>
             </a:xfrm>
             <a:custGeom>
               <a:avLst/>
               <a:pathLst>
-                <a:path w="7090630" h="2998697">
+                <a:path w="7090630" h="2981181">
                   <a:moveTo>
                     <a:pt x="0" y="0"/>
                   </a:moveTo>
                   <a:lnTo>
-                    <a:pt x="71622" y="74669"/>
-                  </a:lnTo>
-                  <a:lnTo>
-                    <a:pt x="143245" y="147680"/>
-                  </a:lnTo>
-                  <a:lnTo>
-                    <a:pt x="214867" y="219071"/>
-                  </a:lnTo>
-                  <a:lnTo>
-                    <a:pt x="286490" y="288876"/>
-                  </a:lnTo>
-                  <a:lnTo>
-                    <a:pt x="358112" y="357131"/>
-                  </a:lnTo>
-                  <a:lnTo>
-                    <a:pt x="429735" y="423871"/>
-                  </a:lnTo>
-                  <a:lnTo>
-                    <a:pt x="501357" y="489128"/>
-                  </a:lnTo>
-                  <a:lnTo>
-                    <a:pt x="572980" y="552937"/>
-                  </a:lnTo>
-                  <a:lnTo>
-                    <a:pt x="644602" y="615329"/>
-                  </a:lnTo>
-                  <a:lnTo>
-                    <a:pt x="716225" y="676335"/>
-                  </a:lnTo>
-                  <a:lnTo>
-                    <a:pt x="787847" y="735987"/>
-                  </a:lnTo>
-                  <a:lnTo>
-                    <a:pt x="859470" y="794315"/>
-                  </a:lnTo>
-                  <a:lnTo>
-                    <a:pt x="931092" y="851347"/>
-                  </a:lnTo>
-                  <a:lnTo>
-                    <a:pt x="1002715" y="907113"/>
-                  </a:lnTo>
-                  <a:lnTo>
-                    <a:pt x="1074337" y="961640"/>
-                  </a:lnTo>
-                  <a:lnTo>
-                    <a:pt x="1145960" y="1014957"/>
-                  </a:lnTo>
-                  <a:lnTo>
-                    <a:pt x="1217582" y="1067090"/>
-                  </a:lnTo>
-                  <a:lnTo>
-                    <a:pt x="1289205" y="1118066"/>
-                  </a:lnTo>
-                  <a:lnTo>
-                    <a:pt x="1360827" y="1167909"/>
-                  </a:lnTo>
-                  <a:lnTo>
-                    <a:pt x="1432450" y="1216646"/>
-                  </a:lnTo>
-                  <a:lnTo>
-                    <a:pt x="1504073" y="1264301"/>
-                  </a:lnTo>
-                  <a:lnTo>
-                    <a:pt x="1575695" y="1310897"/>
-                  </a:lnTo>
-                  <a:lnTo>
-                    <a:pt x="1647318" y="1356459"/>
-                  </a:lnTo>
-                  <a:lnTo>
-                    <a:pt x="1718940" y="1401009"/>
-                  </a:lnTo>
-                  <a:lnTo>
-                    <a:pt x="1790563" y="1444570"/>
-                  </a:lnTo>
-                  <a:lnTo>
-                    <a:pt x="1862185" y="1487164"/>
-                  </a:lnTo>
-                  <a:lnTo>
-                    <a:pt x="1933808" y="1528812"/>
-                  </a:lnTo>
-                  <a:lnTo>
-                    <a:pt x="2005430" y="1569536"/>
-                  </a:lnTo>
-                  <a:lnTo>
-                    <a:pt x="2077053" y="1609355"/>
-                  </a:lnTo>
-                  <a:lnTo>
-                    <a:pt x="2148675" y="1648289"/>
-                  </a:lnTo>
-                  <a:lnTo>
-                    <a:pt x="2220298" y="1686360"/>
-                  </a:lnTo>
-                  <a:lnTo>
-                    <a:pt x="2291920" y="1723585"/>
-                  </a:lnTo>
-                  <a:lnTo>
-                    <a:pt x="2363543" y="1759983"/>
-                  </a:lnTo>
-                  <a:lnTo>
-                    <a:pt x="2435165" y="1795574"/>
-                  </a:lnTo>
-                  <a:lnTo>
-                    <a:pt x="2506788" y="1830374"/>
-                  </a:lnTo>
-                  <a:lnTo>
-                    <a:pt x="2578410" y="1864401"/>
-                  </a:lnTo>
-                  <a:lnTo>
-                    <a:pt x="2650033" y="1897673"/>
-                  </a:lnTo>
-                  <a:lnTo>
-                    <a:pt x="2721655" y="1930206"/>
-                  </a:lnTo>
-                  <a:lnTo>
-                    <a:pt x="2793278" y="1962016"/>
-                  </a:lnTo>
-                  <a:lnTo>
-                    <a:pt x="2864901" y="1993120"/>
-                  </a:lnTo>
-                  <a:lnTo>
-                    <a:pt x="2936523" y="2023534"/>
-                  </a:lnTo>
-                  <a:lnTo>
-                    <a:pt x="3008146" y="2053272"/>
-                  </a:lnTo>
-                  <a:lnTo>
-                    <a:pt x="3079768" y="2082350"/>
-                  </a:lnTo>
-                  <a:lnTo>
-                    <a:pt x="3151391" y="2110783"/>
-                  </a:lnTo>
-                  <a:lnTo>
-                    <a:pt x="3223013" y="2138584"/>
-                  </a:lnTo>
-                  <a:lnTo>
-                    <a:pt x="3294636" y="2165767"/>
-                  </a:lnTo>
-                  <a:lnTo>
-                    <a:pt x="3366258" y="2192348"/>
-                  </a:lnTo>
-                  <a:lnTo>
-                    <a:pt x="3437881" y="2218337"/>
-                  </a:lnTo>
-                  <a:lnTo>
-                    <a:pt x="3509503" y="2243750"/>
-                  </a:lnTo>
-                  <a:lnTo>
-                    <a:pt x="3581126" y="2268599"/>
-                  </a:lnTo>
-                  <a:lnTo>
-                    <a:pt x="3652748" y="2292896"/>
-                  </a:lnTo>
-                  <a:lnTo>
-                    <a:pt x="3724371" y="2316653"/>
-                  </a:lnTo>
-                  <a:lnTo>
-                    <a:pt x="3795993" y="2339883"/>
-                  </a:lnTo>
-                  <a:lnTo>
-                    <a:pt x="3867616" y="2362597"/>
-                  </a:lnTo>
-                  <a:lnTo>
-                    <a:pt x="3939238" y="2384807"/>
-                  </a:lnTo>
-                  <a:lnTo>
-                    <a:pt x="4010861" y="2406523"/>
-                  </a:lnTo>
-                  <a:lnTo>
-                    <a:pt x="4082483" y="2427757"/>
-                  </a:lnTo>
-                  <a:lnTo>
-                    <a:pt x="4154106" y="2448520"/>
-                  </a:lnTo>
-                  <a:lnTo>
-                    <a:pt x="4225729" y="2468822"/>
-                  </a:lnTo>
-                  <a:lnTo>
-                    <a:pt x="4297351" y="2488673"/>
-                  </a:lnTo>
-                  <a:lnTo>
-                    <a:pt x="4368974" y="2508083"/>
-                  </a:lnTo>
-                  <a:lnTo>
-                    <a:pt x="4440596" y="2527062"/>
-                  </a:lnTo>
-                  <a:lnTo>
-                    <a:pt x="4512219" y="2545620"/>
-                  </a:lnTo>
-                  <a:lnTo>
-                    <a:pt x="4583841" y="2563766"/>
-                  </a:lnTo>
-                  <a:lnTo>
-                    <a:pt x="4655464" y="2581509"/>
-                  </a:lnTo>
-                  <a:lnTo>
-                    <a:pt x="4727086" y="2598858"/>
-                  </a:lnTo>
-                  <a:lnTo>
-                    <a:pt x="4798709" y="2615821"/>
-                  </a:lnTo>
-                  <a:lnTo>
-                    <a:pt x="4870331" y="2632408"/>
-                  </a:lnTo>
-                  <a:lnTo>
-                    <a:pt x="4941954" y="2648627"/>
-                  </a:lnTo>
-                  <a:lnTo>
-                    <a:pt x="5013576" y="2664486"/>
-                  </a:lnTo>
-                  <a:lnTo>
-                    <a:pt x="5085199" y="2679992"/>
-                  </a:lnTo>
-                  <a:lnTo>
-                    <a:pt x="5156821" y="2695154"/>
-                  </a:lnTo>
-                  <a:lnTo>
-                    <a:pt x="5228444" y="2709980"/>
-                  </a:lnTo>
-                  <a:lnTo>
-                    <a:pt x="5300066" y="2724476"/>
-                  </a:lnTo>
-                  <a:lnTo>
-                    <a:pt x="5371689" y="2738650"/>
-                  </a:lnTo>
-                  <a:lnTo>
-                    <a:pt x="5443311" y="2752510"/>
-                  </a:lnTo>
-                  <a:lnTo>
-                    <a:pt x="5514934" y="2766062"/>
-                  </a:lnTo>
-                  <a:lnTo>
-                    <a:pt x="5586557" y="2779313"/>
-                  </a:lnTo>
-                  <a:lnTo>
-                    <a:pt x="5658179" y="2792270"/>
-                  </a:lnTo>
-                  <a:lnTo>
-                    <a:pt x="5729802" y="2804939"/>
-                  </a:lnTo>
-                  <a:lnTo>
-                    <a:pt x="5801424" y="2817327"/>
-                  </a:lnTo>
-                  <a:lnTo>
-                    <a:pt x="5873047" y="2829439"/>
-                  </a:lnTo>
-                  <a:lnTo>
-                    <a:pt x="5944669" y="2841283"/>
-                  </a:lnTo>
-                  <a:lnTo>
-                    <a:pt x="6016292" y="2852864"/>
-                  </a:lnTo>
-                  <a:lnTo>
-                    <a:pt x="6087914" y="2864188"/>
-                  </a:lnTo>
-                  <a:lnTo>
-                    <a:pt x="6159537" y="2875260"/>
-                  </a:lnTo>
-                  <a:lnTo>
-                    <a:pt x="6231159" y="2886086"/>
-                  </a:lnTo>
-                  <a:lnTo>
-                    <a:pt x="6302782" y="2896672"/>
-                  </a:lnTo>
-                  <a:lnTo>
-                    <a:pt x="6374404" y="2907023"/>
-                  </a:lnTo>
-                  <a:lnTo>
-                    <a:pt x="6446027" y="2917144"/>
-                  </a:lnTo>
-                  <a:lnTo>
-                    <a:pt x="6517649" y="2927040"/>
-                  </a:lnTo>
-                  <a:lnTo>
-                    <a:pt x="6589272" y="2936717"/>
-                  </a:lnTo>
-                  <a:lnTo>
-                    <a:pt x="6660894" y="2946179"/>
-                  </a:lnTo>
-                  <a:lnTo>
-                    <a:pt x="6732517" y="2955430"/>
-                  </a:lnTo>
-                  <a:lnTo>
-                    <a:pt x="6804139" y="2964477"/>
-                  </a:lnTo>
-                  <a:lnTo>
-                    <a:pt x="6875762" y="2973322"/>
-                  </a:lnTo>
-                  <a:lnTo>
-                    <a:pt x="6947385" y="2981971"/>
-                  </a:lnTo>
-                  <a:lnTo>
-                    <a:pt x="7019007" y="2990428"/>
-                  </a:lnTo>
-                  <a:lnTo>
-                    <a:pt x="7090630" y="2998697"/>
+                    <a:pt x="71622" y="73852"/>
+                  </a:lnTo>
+                  <a:lnTo>
+                    <a:pt x="143245" y="146076"/>
+                  </a:lnTo>
+                  <a:lnTo>
+                    <a:pt x="214867" y="216707"/>
+                  </a:lnTo>
+                  <a:lnTo>
+                    <a:pt x="286490" y="285782"/>
+                  </a:lnTo>
+                  <a:lnTo>
+                    <a:pt x="358112" y="353333"/>
+                  </a:lnTo>
+                  <a:lnTo>
+                    <a:pt x="429735" y="419395"/>
+                  </a:lnTo>
+                  <a:lnTo>
+                    <a:pt x="501357" y="484001"/>
+                  </a:lnTo>
+                  <a:lnTo>
+                    <a:pt x="572980" y="547182"/>
+                  </a:lnTo>
+                  <a:lnTo>
+                    <a:pt x="644602" y="608970"/>
+                  </a:lnTo>
+                  <a:lnTo>
+                    <a:pt x="716225" y="669397"/>
+                  </a:lnTo>
+                  <a:lnTo>
+                    <a:pt x="787847" y="728490"/>
+                  </a:lnTo>
+                  <a:lnTo>
+                    <a:pt x="859470" y="786281"/>
+                  </a:lnTo>
+                  <a:lnTo>
+                    <a:pt x="931092" y="842798"/>
+                  </a:lnTo>
+                  <a:lnTo>
+                    <a:pt x="1002715" y="898069"/>
+                  </a:lnTo>
+                  <a:lnTo>
+                    <a:pt x="1074337" y="952121"/>
+                  </a:lnTo>
+                  <a:lnTo>
+                    <a:pt x="1145960" y="1004981"/>
+                  </a:lnTo>
+                  <a:lnTo>
+                    <a:pt x="1217582" y="1056676"/>
+                  </a:lnTo>
+                  <a:lnTo>
+                    <a:pt x="1289205" y="1107232"/>
+                  </a:lnTo>
+                  <a:lnTo>
+                    <a:pt x="1360827" y="1156672"/>
+                  </a:lnTo>
+                  <a:lnTo>
+                    <a:pt x="1432450" y="1205023"/>
+                  </a:lnTo>
+                  <a:lnTo>
+                    <a:pt x="1504073" y="1252308"/>
+                  </a:lnTo>
+                  <a:lnTo>
+                    <a:pt x="1575695" y="1298550"/>
+                  </a:lnTo>
+                  <a:lnTo>
+                    <a:pt x="1647318" y="1343773"/>
+                  </a:lnTo>
+                  <a:lnTo>
+                    <a:pt x="1718940" y="1387998"/>
+                  </a:lnTo>
+                  <a:lnTo>
+                    <a:pt x="1790563" y="1431249"/>
+                  </a:lnTo>
+                  <a:lnTo>
+                    <a:pt x="1862185" y="1473546"/>
+                  </a:lnTo>
+                  <a:lnTo>
+                    <a:pt x="1933808" y="1514910"/>
+                  </a:lnTo>
+                  <a:lnTo>
+                    <a:pt x="2005430" y="1555363"/>
+                  </a:lnTo>
+                  <a:lnTo>
+                    <a:pt x="2077053" y="1594923"/>
+                  </a:lnTo>
+                  <a:lnTo>
+                    <a:pt x="2148675" y="1633612"/>
+                  </a:lnTo>
+                  <a:lnTo>
+                    <a:pt x="2220298" y="1671447"/>
+                  </a:lnTo>
+                  <a:lnTo>
+                    <a:pt x="2291920" y="1708448"/>
+                  </a:lnTo>
+                  <a:lnTo>
+                    <a:pt x="2363543" y="1744634"/>
+                  </a:lnTo>
+                  <a:lnTo>
+                    <a:pt x="2435165" y="1780021"/>
+                  </a:lnTo>
+                  <a:lnTo>
+                    <a:pt x="2506788" y="1814629"/>
+                  </a:lnTo>
+                  <a:lnTo>
+                    <a:pt x="2578410" y="1848473"/>
+                  </a:lnTo>
+                  <a:lnTo>
+                    <a:pt x="2650033" y="1881572"/>
+                  </a:lnTo>
+                  <a:lnTo>
+                    <a:pt x="2721655" y="1913940"/>
+                  </a:lnTo>
+                  <a:lnTo>
+                    <a:pt x="2793278" y="1945595"/>
+                  </a:lnTo>
+                  <a:lnTo>
+                    <a:pt x="2864901" y="1976552"/>
+                  </a:lnTo>
+                  <a:lnTo>
+                    <a:pt x="2936523" y="2006827"/>
+                  </a:lnTo>
+                  <a:lnTo>
+                    <a:pt x="3008146" y="2036434"/>
+                  </a:lnTo>
+                  <a:lnTo>
+                    <a:pt x="3079768" y="2065388"/>
+                  </a:lnTo>
+                  <a:lnTo>
+                    <a:pt x="3151391" y="2093704"/>
+                  </a:lnTo>
+                  <a:lnTo>
+                    <a:pt x="3223013" y="2121396"/>
+                  </a:lnTo>
+                  <a:lnTo>
+                    <a:pt x="3294636" y="2148477"/>
+                  </a:lnTo>
+                  <a:lnTo>
+                    <a:pt x="3366258" y="2174961"/>
+                  </a:lnTo>
+                  <a:lnTo>
+                    <a:pt x="3437881" y="2200861"/>
+                  </a:lnTo>
+                  <a:lnTo>
+                    <a:pt x="3509503" y="2226190"/>
+                  </a:lnTo>
+                  <a:lnTo>
+                    <a:pt x="3581126" y="2250961"/>
+                  </a:lnTo>
+                  <a:lnTo>
+                    <a:pt x="3652748" y="2275185"/>
+                  </a:lnTo>
+                  <a:lnTo>
+                    <a:pt x="3724371" y="2298876"/>
+                  </a:lnTo>
+                  <a:lnTo>
+                    <a:pt x="3795993" y="2322044"/>
+                  </a:lnTo>
+                  <a:lnTo>
+                    <a:pt x="3867616" y="2344701"/>
+                  </a:lnTo>
+                  <a:lnTo>
+                    <a:pt x="3939238" y="2366859"/>
+                  </a:lnTo>
+                  <a:lnTo>
+                    <a:pt x="4010861" y="2388528"/>
+                  </a:lnTo>
+                  <a:lnTo>
+                    <a:pt x="4082483" y="2409720"/>
+                  </a:lnTo>
+                  <a:lnTo>
+                    <a:pt x="4154106" y="2430444"/>
+                  </a:lnTo>
+                  <a:lnTo>
+                    <a:pt x="4225729" y="2450711"/>
+                  </a:lnTo>
+                  <a:lnTo>
+                    <a:pt x="4297351" y="2470532"/>
+                  </a:lnTo>
+                  <a:lnTo>
+                    <a:pt x="4368974" y="2489916"/>
+                  </a:lnTo>
+                  <a:lnTo>
+                    <a:pt x="4440596" y="2508872"/>
+                  </a:lnTo>
+                  <a:lnTo>
+                    <a:pt x="4512219" y="2527410"/>
+                  </a:lnTo>
+                  <a:lnTo>
+                    <a:pt x="4583841" y="2545540"/>
+                  </a:lnTo>
+                  <a:lnTo>
+                    <a:pt x="4655464" y="2563269"/>
+                  </a:lnTo>
+                  <a:lnTo>
+                    <a:pt x="4727086" y="2580608"/>
+                  </a:lnTo>
+                  <a:lnTo>
+                    <a:pt x="4798709" y="2597565"/>
+                  </a:lnTo>
+                  <a:lnTo>
+                    <a:pt x="4870331" y="2614148"/>
+                  </a:lnTo>
+                  <a:lnTo>
+                    <a:pt x="4941954" y="2630365"/>
+                  </a:lnTo>
+                  <a:lnTo>
+                    <a:pt x="5013576" y="2646225"/>
+                  </a:lnTo>
+                  <a:lnTo>
+                    <a:pt x="5085199" y="2661735"/>
+                  </a:lnTo>
+                  <a:lnTo>
+                    <a:pt x="5156821" y="2676903"/>
+                  </a:lnTo>
+                  <a:lnTo>
+                    <a:pt x="5228444" y="2691737"/>
+                  </a:lnTo>
+                  <a:lnTo>
+                    <a:pt x="5300066" y="2706243"/>
+                  </a:lnTo>
+                  <a:lnTo>
+                    <a:pt x="5371689" y="2720430"/>
+                  </a:lnTo>
+                  <a:lnTo>
+                    <a:pt x="5443311" y="2734304"/>
+                  </a:lnTo>
+                  <a:lnTo>
+                    <a:pt x="5514934" y="2747872"/>
+                  </a:lnTo>
+                  <a:lnTo>
+                    <a:pt x="5586557" y="2761141"/>
+                  </a:lnTo>
+                  <a:lnTo>
+                    <a:pt x="5658179" y="2774117"/>
+                  </a:lnTo>
+                  <a:lnTo>
+                    <a:pt x="5729802" y="2786808"/>
+                  </a:lnTo>
+                  <a:lnTo>
+                    <a:pt x="5801424" y="2799218"/>
+                  </a:lnTo>
+                  <a:lnTo>
+                    <a:pt x="5873047" y="2811355"/>
+                  </a:lnTo>
+                  <a:lnTo>
+                    <a:pt x="5944669" y="2823224"/>
+                  </a:lnTo>
+                  <a:lnTo>
+                    <a:pt x="6016292" y="2834832"/>
+                  </a:lnTo>
+                  <a:lnTo>
+                    <a:pt x="6087914" y="2846184"/>
+                  </a:lnTo>
+                  <a:lnTo>
+                    <a:pt x="6159537" y="2857285"/>
+                  </a:lnTo>
+                  <a:lnTo>
+                    <a:pt x="6231159" y="2868142"/>
+                  </a:lnTo>
+                  <a:lnTo>
+                    <a:pt x="6302782" y="2878759"/>
+                  </a:lnTo>
+                  <a:lnTo>
+                    <a:pt x="6374404" y="2889143"/>
+                  </a:lnTo>
+                  <a:lnTo>
+                    <a:pt x="6446027" y="2899297"/>
+                  </a:lnTo>
+                  <a:lnTo>
+                    <a:pt x="6517649" y="2909227"/>
+                  </a:lnTo>
+                  <a:lnTo>
+                    <a:pt x="6589272" y="2918939"/>
+                  </a:lnTo>
+                  <a:lnTo>
+                    <a:pt x="6660894" y="2928436"/>
+                  </a:lnTo>
+                  <a:lnTo>
+                    <a:pt x="6732517" y="2937724"/>
+                  </a:lnTo>
+                  <a:lnTo>
+                    <a:pt x="6804139" y="2946807"/>
+                  </a:lnTo>
+                  <a:lnTo>
+                    <a:pt x="6875762" y="2955690"/>
+                  </a:lnTo>
+                  <a:lnTo>
+                    <a:pt x="6947385" y="2964378"/>
+                  </a:lnTo>
+                  <a:lnTo>
+                    <a:pt x="7019007" y="2972873"/>
+                  </a:lnTo>
+                  <a:lnTo>
+                    <a:pt x="7090630" y="2981181"/>
                   </a:lnTo>
                 </a:path>
               </a:pathLst>
@@ -4412,7 +4406,7 @@
           </p:nvSpPr>
           <p:spPr>
             <a:xfrm>
-              <a:off x="5636831" y="2073503"/>
+              <a:off x="5656410" y="2073503"/>
               <a:ext cx="0" cy="3649639"/>
             </a:xfrm>
             <a:custGeom>
@@ -4455,7 +4449,7 @@
           </p:nvSpPr>
           <p:spPr>
             <a:xfrm>
-              <a:off x="4328179" y="2073503"/>
+              <a:off x="4335733" y="2073503"/>
               <a:ext cx="0" cy="3649639"/>
             </a:xfrm>
             <a:custGeom>
@@ -4498,7 +4492,7 @@
           </p:nvSpPr>
           <p:spPr>
             <a:xfrm>
-              <a:off x="6683624" y="2073503"/>
+              <a:off x="6684598" y="2073503"/>
               <a:ext cx="0" cy="3649639"/>
             </a:xfrm>
             <a:custGeom>
@@ -4771,7 +4765,7 @@
           </p:nvSpPr>
           <p:spPr>
             <a:xfrm>
-              <a:off x="2970385" y="5785772"/>
+              <a:off x="2971977" y="5785772"/>
               <a:ext cx="161574" cy="80101"/>
             </a:xfrm>
             <a:prstGeom prst="rect">
@@ -4817,7 +4811,7 @@
           </p:nvSpPr>
           <p:spPr>
             <a:xfrm>
-              <a:off x="5501440" y="5785772"/>
+              <a:off x="5499574" y="5785772"/>
               <a:ext cx="62179" cy="80101"/>
             </a:xfrm>
             <a:prstGeom prst="rect">
@@ -4863,7 +4857,7 @@
           </p:nvSpPr>
           <p:spPr>
             <a:xfrm>
-              <a:off x="7951708" y="5785772"/>
+              <a:off x="7946384" y="5785772"/>
               <a:ext cx="124358" cy="80101"/>
             </a:xfrm>
             <a:prstGeom prst="rect">
@@ -5034,7 +5028,7 @@
                   <a:latin typeface="Helvetica"/>
                   <a:cs typeface="Helvetica"/>
                 </a:rPr>
-                <a:t>subHR per 10 mL/min decline: 1.37 (1.05-1.78), p_Bonf = 0.134 (n = 6)  |  per IQR decline (Δ = 23.7): 2.09 (1.11-3.94)  |  IQR: [-12.1, 11.6]</a:t>
+                <a:t>subHR per 10 mL/min decline: 1.36 (1.04-1.78), p_Bonf = 0.141 (n = 6)  |  per IQR decline (Δ = 23.7): 2.08 (1.10-3.91)  |  IQR: [-12.1, 11.6]</a:t>
               </a:r>
             </a:p>
           </p:txBody>
